--- a/Financial_Impact_Portfolio_Thomas_McCoy.pptx
+++ b/Financial_Impact_Portfolio_Thomas_McCoy.pptx
@@ -130,7 +130,7 @@
             <a:pPr>
               <a:defRPr sz="1400" b="0" i="0" u="none" strike="noStrike">
                 <a:solidFill>
-                  <a:srgbClr val="1A1A17"/>
+                  <a:srgbClr val="17171A"/>
                 </a:solidFill>
                 <a:latin typeface="Georgia"/>
               </a:defRPr>
@@ -138,7 +138,7 @@
             <a:r>
               <a:rPr sz="1400" b="0" i="0" u="none" strike="noStrike">
                 <a:solidFill>
-                  <a:srgbClr val="1A1A17"/>
+                  <a:srgbClr val="17171A"/>
                 </a:solidFill>
                 <a:latin typeface="Georgia"/>
               </a:rPr>
@@ -173,7 +173,7 @@
           </c:tx>
           <c:spPr>
             <a:solidFill>
-              <a:srgbClr val="A0032A"/>
+              <a:srgbClr val="1E3A5F"/>
             </a:solidFill>
             <a:effectLst/>
           </c:spPr>
@@ -187,9 +187,9 @@
                 <a:pPr>
                   <a:defRPr b="0" i="0" strike="noStrike" sz="1000" u="none">
                     <a:solidFill>
-                      <a:srgbClr val="1A1A17"/>
+                      <a:srgbClr val="17171A"/>
                     </a:solidFill>
-                    <a:latin typeface="Consolas"/>
+                    <a:latin typeface="Calibri"/>
                   </a:defRPr>
                 </a:pPr>
               </a:p>
@@ -255,9 +255,9 @@
               <a:pPr>
                 <a:defRPr b="0" i="0" strike="noStrike" sz="1000" u="none">
                   <a:solidFill>
-                    <a:srgbClr val="1A1A17"/>
+                    <a:srgbClr val="17171A"/>
                   </a:solidFill>
-                  <a:latin typeface="Consolas"/>
+                  <a:latin typeface="Calibri"/>
                 </a:defRPr>
               </a:pPr>
             </a:p>
@@ -303,7 +303,7 @@
             <a:pPr>
               <a:defRPr sz="1100" b="0" i="0" u="none" strike="noStrike">
                 <a:solidFill>
-                  <a:srgbClr val="1A1A17"/>
+                  <a:srgbClr val="17171A"/>
                 </a:solidFill>
                 <a:latin typeface="Calibri"/>
               </a:defRPr>
@@ -355,9 +355,9 @@
             <a:pPr>
               <a:defRPr sz="900" b="0" i="0" u="none" strike="noStrike">
                 <a:solidFill>
-                  <a:srgbClr val="6B665E"/>
-                </a:solidFill>
-                <a:latin typeface="Consolas"/>
+                  <a:srgbClr val="6E6B66"/>
+                </a:solidFill>
+                <a:latin typeface="Calibri"/>
               </a:defRPr>
             </a:pPr>
             <a:endParaRPr lang="en-US"/>
@@ -380,7 +380,7 @@
   </c:chart>
   <c:spPr>
     <a:solidFill>
-      <a:srgbClr val="FFF1E5"/>
+      <a:srgbClr val="F7F4EF"/>
     </a:solidFill>
     <a:ln>
       <a:noFill/>
@@ -435,7 +435,7 @@
             <c:bubble3D val="0"/>
             <c:spPr>
               <a:solidFill>
-                <a:srgbClr val="A0032A"/>
+                <a:srgbClr val="1E3A5F"/>
               </a:solidFill>
               <a:effectLst/>
             </c:spPr>
@@ -569,7 +569,7 @@
   </c:chart>
   <c:spPr>
     <a:solidFill>
-      <a:srgbClr val="FFF1E5"/>
+      <a:srgbClr val="F7F4EF"/>
     </a:solidFill>
     <a:ln>
       <a:noFill/>
@@ -2124,7 +2124,7 @@
     <p:bg>
       <p:bgPr>
         <a:solidFill>
-          <a:srgbClr val="1A1A17"/>
+          <a:srgbClr val="1E3A5F"/>
         </a:solidFill>
       </p:bgPr>
     </p:bg>
@@ -2169,11 +2169,11 @@
             <a:r>
               <a:rPr lang="en-US" sz="900" b="1" spc="600" kern="0" dirty="0">
                 <a:solidFill>
-                  <a:srgbClr val="A0032A"/>
-                </a:solidFill>
-                <a:latin typeface="Consolas" pitchFamily="34" charset="0"/>
-                <a:ea typeface="Consolas" pitchFamily="34" charset="-122"/>
-                <a:cs typeface="Consolas" pitchFamily="34" charset="-120"/>
+                  <a:srgbClr val="1E3A5F"/>
+                </a:solidFill>
+                <a:latin typeface="Calibri" pitchFamily="34" charset="0"/>
+                <a:ea typeface="Calibri" pitchFamily="34" charset="-122"/>
+                <a:cs typeface="Calibri" pitchFamily="34" charset="-120"/>
               </a:rPr>
               <a:t>● </a:t>
             </a:r>
@@ -2183,11 +2183,11 @@
             <a:r>
               <a:rPr lang="en-US" sz="900" spc="600" kern="0" dirty="0">
                 <a:solidFill>
-                  <a:srgbClr val="FFF1E5"/>
-                </a:solidFill>
-                <a:latin typeface="Consolas" pitchFamily="34" charset="0"/>
-                <a:ea typeface="Consolas" pitchFamily="34" charset="-122"/>
-                <a:cs typeface="Consolas" pitchFamily="34" charset="-120"/>
+                  <a:srgbClr val="F7F4EF"/>
+                </a:solidFill>
+                <a:latin typeface="Calibri" pitchFamily="34" charset="0"/>
+                <a:ea typeface="Calibri" pitchFamily="34" charset="-122"/>
+                <a:cs typeface="Calibri" pitchFamily="34" charset="-120"/>
               </a:rPr>
               <a:t>LIVE TAPE</a:t>
             </a:r>
@@ -2197,11 +2197,11 @@
             <a:r>
               <a:rPr lang="en-US" sz="900" spc="600" kern="0" dirty="0">
                 <a:solidFill>
-                  <a:srgbClr val="FFF1E5"/>
-                </a:solidFill>
-                <a:latin typeface="Consolas" pitchFamily="34" charset="0"/>
-                <a:ea typeface="Consolas" pitchFamily="34" charset="-122"/>
-                <a:cs typeface="Consolas" pitchFamily="34" charset="-120"/>
+                  <a:srgbClr val="F7F4EF"/>
+                </a:solidFill>
+                <a:latin typeface="Calibri" pitchFamily="34" charset="0"/>
+                <a:ea typeface="Calibri" pitchFamily="34" charset="-122"/>
+                <a:cs typeface="Calibri" pitchFamily="34" charset="-120"/>
               </a:rPr>
               <a:t>     PORTFOLIO № 02  /  FINANCIAL IMPACT DOSSIER     </a:t>
             </a:r>
@@ -2211,11 +2211,11 @@
             <a:r>
               <a:rPr lang="en-US" sz="900" spc="600" kern="0" dirty="0">
                 <a:solidFill>
-                  <a:srgbClr val="C8A04A"/>
-                </a:solidFill>
-                <a:latin typeface="Consolas" pitchFamily="34" charset="0"/>
-                <a:ea typeface="Consolas" pitchFamily="34" charset="-122"/>
-                <a:cs typeface="Consolas" pitchFamily="34" charset="-120"/>
+                  <a:srgbClr val="A8C5E8"/>
+                </a:solidFill>
+                <a:latin typeface="Calibri" pitchFamily="34" charset="0"/>
+                <a:ea typeface="Calibri" pitchFamily="34" charset="-122"/>
+                <a:cs typeface="Calibri" pitchFamily="34" charset="-120"/>
               </a:rPr>
               <a:t>FY 2026  —  EDITION 02</a:t>
             </a:r>
@@ -2250,11 +2250,11 @@
             <a:r>
               <a:rPr lang="en-US" sz="1000" spc="1000" kern="0" dirty="0">
                 <a:solidFill>
-                  <a:srgbClr val="C8A04A"/>
-                </a:solidFill>
-                <a:latin typeface="Consolas" pitchFamily="34" charset="0"/>
-                <a:ea typeface="Consolas" pitchFamily="34" charset="-122"/>
-                <a:cs typeface="Consolas" pitchFamily="34" charset="-120"/>
+                  <a:srgbClr val="A8C5E8"/>
+                </a:solidFill>
+                <a:latin typeface="Calibri" pitchFamily="34" charset="0"/>
+                <a:ea typeface="Calibri" pitchFamily="34" charset="-122"/>
+                <a:cs typeface="Calibri" pitchFamily="34" charset="-120"/>
               </a:rPr>
               <a:t>A PORTFOLIO BY</a:t>
             </a:r>
@@ -2289,7 +2289,7 @@
             <a:r>
               <a:rPr lang="en-US" sz="10000" b="1" spc="-200" kern="0" dirty="0">
                 <a:solidFill>
-                  <a:srgbClr val="FFF1E5"/>
+                  <a:srgbClr val="F7F4EF"/>
                 </a:solidFill>
                 <a:latin typeface="Georgia" pitchFamily="34" charset="0"/>
                 <a:ea typeface="Georgia" pitchFamily="34" charset="-122"/>
@@ -2306,13 +2306,13 @@
             <a:r>
               <a:rPr lang="en-US" sz="10000" b="1" spc="-200" kern="0" dirty="0">
                 <a:solidFill>
-                  <a:srgbClr val="FFF1E5"/>
+                  <a:srgbClr val="F7F4EF"/>
                 </a:solidFill>
                 <a:latin typeface="Georgia" pitchFamily="34" charset="0"/>
                 <a:ea typeface="Georgia" pitchFamily="34" charset="-122"/>
                 <a:cs typeface="Georgia" pitchFamily="34" charset="-120"/>
               </a:rPr>
-              <a:t>Mc</a:t>
+              <a:t>M</a:t>
             </a:r>
             <a:pPr indent="0" marL="0">
               <a:buNone/>
@@ -2320,79 +2320,93 @@
             <a:r>
               <a:rPr lang="en-US" sz="10000" b="1" i="1" spc="-200" kern="0" dirty="0">
                 <a:solidFill>
-                  <a:srgbClr val="A0032A"/>
+                  <a:srgbClr val="F7F4EF"/>
                 </a:solidFill>
                 <a:latin typeface="Georgia" pitchFamily="34" charset="0"/>
                 <a:ea typeface="Georgia" pitchFamily="34" charset="-122"/>
                 <a:cs typeface="Georgia" pitchFamily="34" charset="-120"/>
               </a:rPr>
-              <a:t>Coy.</a:t>
-            </a:r>
-            <a:endParaRPr lang="en-US" sz="10000" dirty="0"/>
-          </a:p>
-        </p:txBody>
-      </p:sp>
-      <p:sp>
-        <p:nvSpPr>
-          <p:cNvPr id="5" name="Text 3"/>
-          <p:cNvSpPr/>
-          <p:nvPr/>
-        </p:nvSpPr>
-        <p:spPr>
-          <a:xfrm>
-            <a:off x="822960" y="4526280"/>
-            <a:ext cx="10972800" cy="365760"/>
-          </a:xfrm>
-          <a:prstGeom prst="rect">
-            <a:avLst/>
-          </a:prstGeom>
-          <a:noFill/>
-          <a:ln/>
-        </p:spPr>
-        <p:txBody>
-          <a:bodyPr wrap="square" lIns="0" tIns="0" rIns="0" bIns="0" rtlCol="0" anchor="ctr"/>
-          <a:lstStyle/>
-          <a:p>
-            <a:pPr indent="0" marL="0">
-              <a:buNone/>
-            </a:pPr>
-            <a:r>
-              <a:rPr lang="en-US" sz="2000" dirty="0">
-                <a:solidFill>
-                  <a:srgbClr val="FFF1E5"/>
+              <a:t>c</a:t>
+            </a:r>
+            <a:pPr indent="0" marL="0">
+              <a:buNone/>
+            </a:pPr>
+            <a:r>
+              <a:rPr lang="en-US" sz="10000" b="1" spc="-200" kern="0" dirty="0">
+                <a:solidFill>
+                  <a:srgbClr val="F7F4EF"/>
                 </a:solidFill>
                 <a:latin typeface="Georgia" pitchFamily="34" charset="0"/>
                 <a:ea typeface="Georgia" pitchFamily="34" charset="-122"/>
                 <a:cs typeface="Georgia" pitchFamily="34" charset="-120"/>
               </a:rPr>
-              <a:t>Financial Impact Portfolio</a:t>
-            </a:r>
+              <a:t>Coy.</a:t>
+            </a:r>
+            <a:endParaRPr lang="en-US" sz="10000" dirty="0"/>
+          </a:p>
+        </p:txBody>
+      </p:sp>
+      <p:sp>
+        <p:nvSpPr>
+          <p:cNvPr id="5" name="Text 3"/>
+          <p:cNvSpPr/>
+          <p:nvPr/>
+        </p:nvSpPr>
+        <p:spPr>
+          <a:xfrm>
+            <a:off x="822960" y="4526280"/>
+            <a:ext cx="10972800" cy="365760"/>
+          </a:xfrm>
+          <a:prstGeom prst="rect">
+            <a:avLst/>
+          </a:prstGeom>
+          <a:noFill/>
+          <a:ln/>
+        </p:spPr>
+        <p:txBody>
+          <a:bodyPr wrap="square" lIns="0" tIns="0" rIns="0" bIns="0" rtlCol="0" anchor="ctr"/>
+          <a:lstStyle/>
+          <a:p>
             <a:pPr indent="0" marL="0">
               <a:buNone/>
             </a:pPr>
             <a:r>
               <a:rPr lang="en-US" sz="2000" dirty="0">
                 <a:solidFill>
-                  <a:srgbClr val="C8A04A"/>
+                  <a:srgbClr val="F7F4EF"/>
                 </a:solidFill>
                 <a:latin typeface="Georgia" pitchFamily="34" charset="0"/>
                 <a:ea typeface="Georgia" pitchFamily="34" charset="-122"/>
                 <a:cs typeface="Georgia" pitchFamily="34" charset="-120"/>
               </a:rPr>
-              <a:t>  ·  </a:t>
-            </a:r>
-            <a:pPr indent="0" marL="0">
-              <a:buNone/>
-            </a:pPr>
-            <a:r>
-              <a:rPr lang="en-US" sz="2000" i="1" dirty="0">
-                <a:solidFill>
-                  <a:srgbClr val="FFF1E5"/>
+              <a:t>Financial Impact Portfolio</a:t>
+            </a:r>
+            <a:pPr indent="0" marL="0">
+              <a:buNone/>
+            </a:pPr>
+            <a:r>
+              <a:rPr lang="en-US" sz="2000" dirty="0">
+                <a:solidFill>
+                  <a:srgbClr val="A8C5E8"/>
                 </a:solidFill>
                 <a:latin typeface="Georgia" pitchFamily="34" charset="0"/>
                 <a:ea typeface="Georgia" pitchFamily="34" charset="-122"/>
                 <a:cs typeface="Georgia" pitchFamily="34" charset="-120"/>
               </a:rPr>
+              <a:t>  ·  </a:t>
+            </a:r>
+            <a:pPr indent="0" marL="0">
+              <a:buNone/>
+            </a:pPr>
+            <a:r>
+              <a:rPr lang="en-US" sz="2000" i="1" dirty="0">
+                <a:solidFill>
+                  <a:srgbClr val="F7F4EF"/>
+                </a:solidFill>
+                <a:latin typeface="Georgia" pitchFamily="34" charset="0"/>
+                <a:ea typeface="Georgia" pitchFamily="34" charset="-122"/>
+                <a:cs typeface="Georgia" pitchFamily="34" charset="-120"/>
+              </a:rPr>
               <a:t>Senior Accountant &amp; Grant Auditor</a:t>
             </a:r>
             <a:endParaRPr lang="en-US" sz="2000" dirty="0"/>
@@ -2426,11 +2440,11 @@
             <a:r>
               <a:rPr lang="en-US" sz="900" spc="800" kern="0" dirty="0">
                 <a:solidFill>
-                  <a:srgbClr val="C8A04A"/>
-                </a:solidFill>
-                <a:latin typeface="Consolas" pitchFamily="34" charset="0"/>
-                <a:ea typeface="Consolas" pitchFamily="34" charset="-122"/>
-                <a:cs typeface="Consolas" pitchFamily="34" charset="-120"/>
+                  <a:srgbClr val="A8C5E8"/>
+                </a:solidFill>
+                <a:latin typeface="Calibri" pitchFamily="34" charset="0"/>
+                <a:ea typeface="Calibri" pitchFamily="34" charset="-122"/>
+                <a:cs typeface="Calibri" pitchFamily="34" charset="-120"/>
               </a:rPr>
               <a:t>EMAIL</a:t>
             </a:r>
@@ -2465,7 +2479,7 @@
             <a:r>
               <a:rPr lang="en-US" sz="1300" dirty="0">
                 <a:solidFill>
-                  <a:srgbClr val="FFF1E5"/>
+                  <a:srgbClr val="F7F4EF"/>
                 </a:solidFill>
                 <a:latin typeface="Calibri" pitchFamily="34" charset="0"/>
                 <a:ea typeface="Calibri" pitchFamily="34" charset="-122"/>
@@ -2504,11 +2518,11 @@
             <a:r>
               <a:rPr lang="en-US" sz="900" spc="800" kern="0" dirty="0">
                 <a:solidFill>
-                  <a:srgbClr val="C8A04A"/>
-                </a:solidFill>
-                <a:latin typeface="Consolas" pitchFamily="34" charset="0"/>
-                <a:ea typeface="Consolas" pitchFamily="34" charset="-122"/>
-                <a:cs typeface="Consolas" pitchFamily="34" charset="-120"/>
+                  <a:srgbClr val="A8C5E8"/>
+                </a:solidFill>
+                <a:latin typeface="Calibri" pitchFamily="34" charset="0"/>
+                <a:ea typeface="Calibri" pitchFamily="34" charset="-122"/>
+                <a:cs typeface="Calibri" pitchFamily="34" charset="-120"/>
               </a:rPr>
               <a:t>TELEPHONE</a:t>
             </a:r>
@@ -2543,7 +2557,7 @@
             <a:r>
               <a:rPr lang="en-US" sz="1300" dirty="0">
                 <a:solidFill>
-                  <a:srgbClr val="FFF1E5"/>
+                  <a:srgbClr val="F7F4EF"/>
                 </a:solidFill>
                 <a:latin typeface="Calibri" pitchFamily="34" charset="0"/>
                 <a:ea typeface="Calibri" pitchFamily="34" charset="-122"/>
@@ -2582,11 +2596,11 @@
             <a:r>
               <a:rPr lang="en-US" sz="900" spc="800" kern="0" dirty="0">
                 <a:solidFill>
-                  <a:srgbClr val="C8A04A"/>
-                </a:solidFill>
-                <a:latin typeface="Consolas" pitchFamily="34" charset="0"/>
-                <a:ea typeface="Consolas" pitchFamily="34" charset="-122"/>
-                <a:cs typeface="Consolas" pitchFamily="34" charset="-120"/>
+                  <a:srgbClr val="A8C5E8"/>
+                </a:solidFill>
+                <a:latin typeface="Calibri" pitchFamily="34" charset="0"/>
+                <a:ea typeface="Calibri" pitchFamily="34" charset="-122"/>
+                <a:cs typeface="Calibri" pitchFamily="34" charset="-120"/>
               </a:rPr>
               <a:t>LOCATION</a:t>
             </a:r>
@@ -2621,7 +2635,7 @@
             <a:r>
               <a:rPr lang="en-US" sz="1300" dirty="0">
                 <a:solidFill>
-                  <a:srgbClr val="FFF1E5"/>
+                  <a:srgbClr val="F7F4EF"/>
                 </a:solidFill>
                 <a:latin typeface="Calibri" pitchFamily="34" charset="0"/>
                 <a:ea typeface="Calibri" pitchFamily="34" charset="-122"/>
@@ -2648,7 +2662,7 @@
             <a:avLst/>
           </a:prstGeom>
           <a:solidFill>
-            <a:srgbClr val="C8A04A"/>
+            <a:srgbClr val="A8C5E8"/>
           </a:solidFill>
           <a:ln/>
         </p:spPr>
@@ -2680,11 +2694,11 @@
             <a:r>
               <a:rPr lang="en-US" sz="800" spc="600" kern="0" dirty="0">
                 <a:solidFill>
-                  <a:srgbClr val="6B665E"/>
-                </a:solidFill>
-                <a:latin typeface="Consolas" pitchFamily="34" charset="0"/>
-                <a:ea typeface="Consolas" pitchFamily="34" charset="-122"/>
-                <a:cs typeface="Consolas" pitchFamily="34" charset="-120"/>
+                  <a:srgbClr val="6E6B66"/>
+                </a:solidFill>
+                <a:latin typeface="Calibri" pitchFamily="34" charset="0"/>
+                <a:ea typeface="Calibri" pitchFamily="34" charset="-122"/>
+                <a:cs typeface="Calibri" pitchFamily="34" charset="-120"/>
               </a:rPr>
               <a:t>FINANCIAL IMPACT PORTFOLIO  ·  FY 2026  ·  © MMXXVI</a:t>
             </a:r>
@@ -2706,7 +2720,7 @@
     <p:bg>
       <p:bgPr>
         <a:solidFill>
-          <a:srgbClr val="1A1A17"/>
+          <a:srgbClr val="1E3A5F"/>
         </a:solidFill>
       </p:bgPr>
     </p:bg>
@@ -2739,7 +2753,7 @@
             <a:avLst/>
           </a:prstGeom>
           <a:solidFill>
-            <a:srgbClr val="FFF1E5"/>
+            <a:srgbClr val="F7F4EF"/>
           </a:solidFill>
           <a:ln/>
         </p:spPr>
@@ -2771,11 +2785,11 @@
             <a:r>
               <a:rPr lang="en-US" sz="900" b="1" spc="400" kern="0" dirty="0">
                 <a:solidFill>
-                  <a:srgbClr val="C8A04A"/>
-                </a:solidFill>
-                <a:latin typeface="Consolas" pitchFamily="34" charset="0"/>
-                <a:ea typeface="Consolas" pitchFamily="34" charset="-122"/>
-                <a:cs typeface="Consolas" pitchFamily="34" charset="-120"/>
+                  <a:srgbClr val="A8C5E8"/>
+                </a:solidFill>
+                <a:latin typeface="Calibri" pitchFamily="34" charset="0"/>
+                <a:ea typeface="Calibri" pitchFamily="34" charset="-122"/>
+                <a:cs typeface="Calibri" pitchFamily="34" charset="-120"/>
               </a:rPr>
               <a:t>§ 10   </a:t>
             </a:r>
@@ -2785,11 +2799,11 @@
             <a:r>
               <a:rPr lang="en-US" sz="900" spc="400" kern="0" dirty="0">
                 <a:solidFill>
-                  <a:srgbClr val="FFF1E5"/>
-                </a:solidFill>
-                <a:latin typeface="Consolas" pitchFamily="34" charset="0"/>
-                <a:ea typeface="Consolas" pitchFamily="34" charset="-122"/>
-                <a:cs typeface="Consolas" pitchFamily="34" charset="-120"/>
+                  <a:srgbClr val="F7F4EF"/>
+                </a:solidFill>
+                <a:latin typeface="Calibri" pitchFamily="34" charset="0"/>
+                <a:ea typeface="Calibri" pitchFamily="34" charset="-122"/>
+                <a:cs typeface="Calibri" pitchFamily="34" charset="-120"/>
               </a:rPr>
               <a:t>CLOSE  ·  OPEN LINE</a:t>
             </a:r>
@@ -2824,11 +2838,11 @@
             <a:r>
               <a:rPr lang="en-US" sz="900" spc="400" kern="0" dirty="0">
                 <a:solidFill>
-                  <a:srgbClr val="C8A04A"/>
-                </a:solidFill>
-                <a:latin typeface="Consolas" pitchFamily="34" charset="0"/>
-                <a:ea typeface="Consolas" pitchFamily="34" charset="-122"/>
-                <a:cs typeface="Consolas" pitchFamily="34" charset="-120"/>
+                  <a:srgbClr val="A8C5E8"/>
+                </a:solidFill>
+                <a:latin typeface="Calibri" pitchFamily="34" charset="0"/>
+                <a:ea typeface="Calibri" pitchFamily="34" charset="-122"/>
+                <a:cs typeface="Calibri" pitchFamily="34" charset="-120"/>
               </a:rPr>
               <a:t>THE LEDGER, VOL. I  ·  FIN.</a:t>
             </a:r>
@@ -2863,11 +2877,11 @@
             <a:r>
               <a:rPr lang="en-US" sz="1000" spc="1000" kern="0" dirty="0">
                 <a:solidFill>
-                  <a:srgbClr val="C8A04A"/>
-                </a:solidFill>
-                <a:latin typeface="Consolas" pitchFamily="34" charset="0"/>
-                <a:ea typeface="Consolas" pitchFamily="34" charset="-122"/>
-                <a:cs typeface="Consolas" pitchFamily="34" charset="-120"/>
+                  <a:srgbClr val="A8C5E8"/>
+                </a:solidFill>
+                <a:latin typeface="Calibri" pitchFamily="34" charset="0"/>
+                <a:ea typeface="Calibri" pitchFamily="34" charset="-122"/>
+                <a:cs typeface="Calibri" pitchFamily="34" charset="-120"/>
               </a:rPr>
               <a:t>THANK YOU</a:t>
             </a:r>
@@ -2902,7 +2916,7 @@
             <a:r>
               <a:rPr lang="en-US" sz="9600" b="1" spc="-200" kern="0" dirty="0">
                 <a:solidFill>
-                  <a:srgbClr val="FFF1E5"/>
+                  <a:srgbClr val="F7F4EF"/>
                 </a:solidFill>
                 <a:latin typeface="Georgia" pitchFamily="34" charset="0"/>
                 <a:ea typeface="Georgia" pitchFamily="34" charset="-122"/>
@@ -2919,7 +2933,7 @@
             <a:r>
               <a:rPr lang="en-US" sz="9600" b="1" i="1" spc="-200" kern="0" dirty="0">
                 <a:solidFill>
-                  <a:srgbClr val="C8A04A"/>
+                  <a:srgbClr val="A8C5E8"/>
                 </a:solidFill>
                 <a:latin typeface="Georgia" pitchFamily="34" charset="0"/>
                 <a:ea typeface="Georgia" pitchFamily="34" charset="-122"/>
@@ -2946,7 +2960,7 @@
             <a:avLst/>
           </a:prstGeom>
           <a:solidFill>
-            <a:srgbClr val="C8A04A"/>
+            <a:srgbClr val="A8C5E8"/>
           </a:solidFill>
           <a:ln/>
         </p:spPr>
@@ -2978,11 +2992,11 @@
             <a:r>
               <a:rPr lang="en-US" sz="900" spc="800" kern="0" dirty="0">
                 <a:solidFill>
-                  <a:srgbClr val="C8A04A"/>
-                </a:solidFill>
-                <a:latin typeface="Consolas" pitchFamily="34" charset="0"/>
-                <a:ea typeface="Consolas" pitchFamily="34" charset="-122"/>
-                <a:cs typeface="Consolas" pitchFamily="34" charset="-120"/>
+                  <a:srgbClr val="A8C5E8"/>
+                </a:solidFill>
+                <a:latin typeface="Calibri" pitchFamily="34" charset="0"/>
+                <a:ea typeface="Calibri" pitchFamily="34" charset="-122"/>
+                <a:cs typeface="Calibri" pitchFamily="34" charset="-120"/>
               </a:rPr>
               <a:t>EMAIL</a:t>
             </a:r>
@@ -3017,7 +3031,7 @@
             <a:r>
               <a:rPr lang="en-US" sz="1200" dirty="0">
                 <a:solidFill>
-                  <a:srgbClr val="FFF1E5"/>
+                  <a:srgbClr val="F7F4EF"/>
                 </a:solidFill>
                 <a:latin typeface="Calibri" pitchFamily="34" charset="0"/>
                 <a:ea typeface="Calibri" pitchFamily="34" charset="-122"/>
@@ -3044,7 +3058,7 @@
             <a:avLst/>
           </a:prstGeom>
           <a:solidFill>
-            <a:srgbClr val="C8A04A"/>
+            <a:srgbClr val="A8C5E8"/>
           </a:solidFill>
           <a:ln/>
         </p:spPr>
@@ -3076,11 +3090,11 @@
             <a:r>
               <a:rPr lang="en-US" sz="900" spc="800" kern="0" dirty="0">
                 <a:solidFill>
-                  <a:srgbClr val="C8A04A"/>
-                </a:solidFill>
-                <a:latin typeface="Consolas" pitchFamily="34" charset="0"/>
-                <a:ea typeface="Consolas" pitchFamily="34" charset="-122"/>
-                <a:cs typeface="Consolas" pitchFamily="34" charset="-120"/>
+                  <a:srgbClr val="A8C5E8"/>
+                </a:solidFill>
+                <a:latin typeface="Calibri" pitchFamily="34" charset="0"/>
+                <a:ea typeface="Calibri" pitchFamily="34" charset="-122"/>
+                <a:cs typeface="Calibri" pitchFamily="34" charset="-120"/>
               </a:rPr>
               <a:t>TELEPHONE</a:t>
             </a:r>
@@ -3115,7 +3129,7 @@
             <a:r>
               <a:rPr lang="en-US" sz="1200" dirty="0">
                 <a:solidFill>
-                  <a:srgbClr val="FFF1E5"/>
+                  <a:srgbClr val="F7F4EF"/>
                 </a:solidFill>
                 <a:latin typeface="Calibri" pitchFamily="34" charset="0"/>
                 <a:ea typeface="Calibri" pitchFamily="34" charset="-122"/>
@@ -3142,7 +3156,7 @@
             <a:avLst/>
           </a:prstGeom>
           <a:solidFill>
-            <a:srgbClr val="C8A04A"/>
+            <a:srgbClr val="A8C5E8"/>
           </a:solidFill>
           <a:ln/>
         </p:spPr>
@@ -3174,11 +3188,11 @@
             <a:r>
               <a:rPr lang="en-US" sz="900" spc="800" kern="0" dirty="0">
                 <a:solidFill>
-                  <a:srgbClr val="C8A04A"/>
-                </a:solidFill>
-                <a:latin typeface="Consolas" pitchFamily="34" charset="0"/>
-                <a:ea typeface="Consolas" pitchFamily="34" charset="-122"/>
-                <a:cs typeface="Consolas" pitchFamily="34" charset="-120"/>
+                  <a:srgbClr val="A8C5E8"/>
+                </a:solidFill>
+                <a:latin typeface="Calibri" pitchFamily="34" charset="0"/>
+                <a:ea typeface="Calibri" pitchFamily="34" charset="-122"/>
+                <a:cs typeface="Calibri" pitchFamily="34" charset="-120"/>
               </a:rPr>
               <a:t>LOCATION</a:t>
             </a:r>
@@ -3213,7 +3227,7 @@
             <a:r>
               <a:rPr lang="en-US" sz="1200" dirty="0">
                 <a:solidFill>
-                  <a:srgbClr val="FFF1E5"/>
+                  <a:srgbClr val="F7F4EF"/>
                 </a:solidFill>
                 <a:latin typeface="Calibri" pitchFamily="34" charset="0"/>
                 <a:ea typeface="Calibri" pitchFamily="34" charset="-122"/>
@@ -3240,7 +3254,7 @@
             <a:avLst/>
           </a:prstGeom>
           <a:solidFill>
-            <a:srgbClr val="C8A04A"/>
+            <a:srgbClr val="A8C5E8"/>
           </a:solidFill>
           <a:ln/>
         </p:spPr>
@@ -3272,11 +3286,11 @@
             <a:r>
               <a:rPr lang="en-US" sz="800" spc="600" kern="0" dirty="0">
                 <a:solidFill>
-                  <a:srgbClr val="6B665E"/>
-                </a:solidFill>
-                <a:latin typeface="Consolas" pitchFamily="34" charset="0"/>
-                <a:ea typeface="Consolas" pitchFamily="34" charset="-122"/>
-                <a:cs typeface="Consolas" pitchFamily="34" charset="-120"/>
+                  <a:srgbClr val="6E6B66"/>
+                </a:solidFill>
+                <a:latin typeface="Calibri" pitchFamily="34" charset="0"/>
+                <a:ea typeface="Calibri" pitchFamily="34" charset="-122"/>
+                <a:cs typeface="Calibri" pitchFamily="34" charset="-120"/>
               </a:rPr>
               <a:t>FINANCIAL IMPACT PORTFOLIO  —  THOMAS MCCOY  —  FIN.  ·  EDITION 02</a:t>
             </a:r>
@@ -3298,7 +3312,7 @@
     <p:bg>
       <p:bgPr>
         <a:solidFill>
-          <a:srgbClr val="FFF1E5"/>
+          <a:srgbClr val="F7F4EF"/>
         </a:solidFill>
       </p:bgPr>
     </p:bg>
@@ -3331,7 +3345,7 @@
             <a:avLst/>
           </a:prstGeom>
           <a:solidFill>
-            <a:srgbClr val="1A1A17"/>
+            <a:srgbClr val="17171A"/>
           </a:solidFill>
           <a:ln/>
         </p:spPr>
@@ -3363,11 +3377,11 @@
             <a:r>
               <a:rPr lang="en-US" sz="900" b="1" spc="400" kern="0" dirty="0">
                 <a:solidFill>
-                  <a:srgbClr val="A0032A"/>
-                </a:solidFill>
-                <a:latin typeface="Consolas" pitchFamily="34" charset="0"/>
-                <a:ea typeface="Consolas" pitchFamily="34" charset="-122"/>
-                <a:cs typeface="Consolas" pitchFamily="34" charset="-120"/>
+                  <a:srgbClr val="1E3A5F"/>
+                </a:solidFill>
+                <a:latin typeface="Calibri" pitchFamily="34" charset="0"/>
+                <a:ea typeface="Calibri" pitchFamily="34" charset="-122"/>
+                <a:cs typeface="Calibri" pitchFamily="34" charset="-120"/>
               </a:rPr>
               <a:t>§ 02   </a:t>
             </a:r>
@@ -3377,11 +3391,11 @@
             <a:r>
               <a:rPr lang="en-US" sz="900" spc="400" kern="0" dirty="0">
                 <a:solidFill>
-                  <a:srgbClr val="1A1A17"/>
-                </a:solidFill>
-                <a:latin typeface="Consolas" pitchFamily="34" charset="0"/>
-                <a:ea typeface="Consolas" pitchFamily="34" charset="-122"/>
-                <a:cs typeface="Consolas" pitchFamily="34" charset="-120"/>
+                  <a:srgbClr val="17171A"/>
+                </a:solidFill>
+                <a:latin typeface="Calibri" pitchFamily="34" charset="0"/>
+                <a:ea typeface="Calibri" pitchFamily="34" charset="-122"/>
+                <a:cs typeface="Calibri" pitchFamily="34" charset="-120"/>
               </a:rPr>
               <a:t>PROFESSIONAL SUMMARY</a:t>
             </a:r>
@@ -3416,11 +3430,11 @@
             <a:r>
               <a:rPr lang="en-US" sz="900" spc="400" kern="0" dirty="0">
                 <a:solidFill>
-                  <a:srgbClr val="6B665E"/>
-                </a:solidFill>
-                <a:latin typeface="Consolas" pitchFamily="34" charset="0"/>
-                <a:ea typeface="Consolas" pitchFamily="34" charset="-122"/>
-                <a:cs typeface="Consolas" pitchFamily="34" charset="-120"/>
+                  <a:srgbClr val="6E6B66"/>
+                </a:solidFill>
+                <a:latin typeface="Calibri" pitchFamily="34" charset="0"/>
+                <a:ea typeface="Calibri" pitchFamily="34" charset="-122"/>
+                <a:cs typeface="Calibri" pitchFamily="34" charset="-120"/>
               </a:rPr>
               <a:t>THOMAS MCCOY — THE LEDGER, VOL. I</a:t>
             </a:r>
@@ -3443,7 +3457,7 @@
             <a:avLst/>
           </a:prstGeom>
           <a:solidFill>
-            <a:srgbClr val="1A1A17"/>
+            <a:srgbClr val="17171A"/>
           </a:solidFill>
           <a:ln/>
         </p:spPr>
@@ -3475,11 +3489,11 @@
             <a:r>
               <a:rPr lang="en-US" sz="800" dirty="0">
                 <a:solidFill>
-                  <a:srgbClr val="6B665E"/>
-                </a:solidFill>
-                <a:latin typeface="Consolas" pitchFamily="34" charset="0"/>
-                <a:ea typeface="Consolas" pitchFamily="34" charset="-122"/>
-                <a:cs typeface="Consolas" pitchFamily="34" charset="-120"/>
+                  <a:srgbClr val="6E6B66"/>
+                </a:solidFill>
+                <a:latin typeface="Calibri" pitchFamily="34" charset="0"/>
+                <a:ea typeface="Calibri" pitchFamily="34" charset="-122"/>
+                <a:cs typeface="Calibri" pitchFamily="34" charset="-120"/>
               </a:rPr>
               <a:t>tpmccoy2020@gmail.com  ·  480.828.1125  ·  Gilbert, AZ</a:t>
             </a:r>
@@ -3514,11 +3528,11 @@
             <a:r>
               <a:rPr lang="en-US" sz="800" spc="400" kern="0" dirty="0">
                 <a:solidFill>
-                  <a:srgbClr val="6B665E"/>
-                </a:solidFill>
-                <a:latin typeface="Consolas" pitchFamily="34" charset="0"/>
-                <a:ea typeface="Consolas" pitchFamily="34" charset="-122"/>
-                <a:cs typeface="Consolas" pitchFamily="34" charset="-120"/>
+                  <a:srgbClr val="6E6B66"/>
+                </a:solidFill>
+                <a:latin typeface="Calibri" pitchFamily="34" charset="0"/>
+                <a:ea typeface="Calibri" pitchFamily="34" charset="-122"/>
+                <a:cs typeface="Calibri" pitchFamily="34" charset="-120"/>
               </a:rPr>
               <a:t>PORTFOLIO № 02   /   02 OF 10</a:t>
             </a:r>
@@ -3553,7 +3567,7 @@
             <a:r>
               <a:rPr lang="en-US" sz="6200" b="1" spc="-200" kern="0" dirty="0">
                 <a:solidFill>
-                  <a:srgbClr val="1A1A17"/>
+                  <a:srgbClr val="17171A"/>
                 </a:solidFill>
                 <a:latin typeface="Georgia" pitchFamily="34" charset="0"/>
                 <a:ea typeface="Georgia" pitchFamily="34" charset="-122"/>
@@ -3567,7 +3581,7 @@
             <a:r>
               <a:rPr lang="en-US" sz="6200" b="1" i="1" spc="-200" kern="0" dirty="0">
                 <a:solidFill>
-                  <a:srgbClr val="A0032A"/>
+                  <a:srgbClr val="1E3A5F"/>
                 </a:solidFill>
                 <a:latin typeface="Georgia" pitchFamily="34" charset="0"/>
                 <a:ea typeface="Georgia" pitchFamily="34" charset="-122"/>
@@ -3581,7 +3595,7 @@
             <a:r>
               <a:rPr lang="en-US" sz="6200" b="1" spc="-200" kern="0" dirty="0">
                 <a:solidFill>
-                  <a:srgbClr val="1A1A17"/>
+                  <a:srgbClr val="17171A"/>
                 </a:solidFill>
                 <a:latin typeface="Georgia" pitchFamily="34" charset="0"/>
                 <a:ea typeface="Georgia" pitchFamily="34" charset="-122"/>
@@ -3623,7 +3637,7 @@
             <a:r>
               <a:rPr lang="en-US" sz="1600" dirty="0">
                 <a:solidFill>
-                  <a:srgbClr val="2C2C29"/>
+                  <a:srgbClr val="2A2A2D"/>
                 </a:solidFill>
                 <a:latin typeface="Calibri" pitchFamily="34" charset="0"/>
                 <a:ea typeface="Calibri" pitchFamily="34" charset="-122"/>
@@ -3640,7 +3654,7 @@
             <a:r>
               <a:rPr lang="en-US" sz="1600" b="1" dirty="0">
                 <a:solidFill>
-                  <a:srgbClr val="A0032A"/>
+                  <a:srgbClr val="1E3A5F"/>
                 </a:solidFill>
                 <a:latin typeface="Calibri" pitchFamily="34" charset="0"/>
                 <a:ea typeface="Calibri" pitchFamily="34" charset="-122"/>
@@ -3657,7 +3671,7 @@
             <a:r>
               <a:rPr lang="en-US" sz="1600" dirty="0">
                 <a:solidFill>
-                  <a:srgbClr val="2C2C29"/>
+                  <a:srgbClr val="2A2A2D"/>
                 </a:solidFill>
                 <a:latin typeface="Calibri" pitchFamily="34" charset="0"/>
                 <a:ea typeface="Calibri" pitchFamily="34" charset="-122"/>
@@ -3684,7 +3698,7 @@
             <a:avLst/>
           </a:prstGeom>
           <a:solidFill>
-            <a:srgbClr val="F4ECDF"/>
+            <a:srgbClr val="EDE8DE"/>
           </a:solidFill>
           <a:ln/>
         </p:spPr>
@@ -3716,11 +3730,11 @@
             <a:r>
               <a:rPr lang="en-US" sz="900" b="1" spc="800" kern="0" dirty="0">
                 <a:solidFill>
-                  <a:srgbClr val="A0032A"/>
-                </a:solidFill>
-                <a:latin typeface="Consolas" pitchFamily="34" charset="0"/>
-                <a:ea typeface="Consolas" pitchFamily="34" charset="-122"/>
-                <a:cs typeface="Consolas" pitchFamily="34" charset="-120"/>
+                  <a:srgbClr val="1E3A5F"/>
+                </a:solidFill>
+                <a:latin typeface="Calibri" pitchFamily="34" charset="0"/>
+                <a:ea typeface="Calibri" pitchFamily="34" charset="-122"/>
+                <a:cs typeface="Calibri" pitchFamily="34" charset="-120"/>
               </a:rPr>
               <a:t>§ WHAT I BRING TO A TEAM</a:t>
             </a:r>
@@ -3743,7 +3757,7 @@
             <a:avLst/>
           </a:prstGeom>
           <a:solidFill>
-            <a:srgbClr val="A0032A"/>
+            <a:srgbClr val="1E3A5F"/>
           </a:solidFill>
           <a:ln/>
         </p:spPr>
@@ -3775,11 +3789,11 @@
             <a:r>
               <a:rPr lang="en-US" sz="800" spc="600" kern="0" dirty="0">
                 <a:solidFill>
-                  <a:srgbClr val="6B665E"/>
-                </a:solidFill>
-                <a:latin typeface="Consolas" pitchFamily="34" charset="0"/>
-                <a:ea typeface="Consolas" pitchFamily="34" charset="-122"/>
-                <a:cs typeface="Consolas" pitchFamily="34" charset="-120"/>
+                  <a:srgbClr val="6E6B66"/>
+                </a:solidFill>
+                <a:latin typeface="Calibri" pitchFamily="34" charset="0"/>
+                <a:ea typeface="Calibri" pitchFamily="34" charset="-122"/>
+                <a:cs typeface="Calibri" pitchFamily="34" charset="-120"/>
               </a:rPr>
               <a:t>/ 01</a:t>
             </a:r>
@@ -3814,7 +3828,7 @@
             <a:r>
               <a:rPr lang="en-US" sz="1600" b="1" spc="-100" kern="0" dirty="0">
                 <a:solidFill>
-                  <a:srgbClr val="1A1A17"/>
+                  <a:srgbClr val="17171A"/>
                 </a:solidFill>
                 <a:latin typeface="Georgia" pitchFamily="34" charset="0"/>
                 <a:ea typeface="Georgia" pitchFamily="34" charset="-122"/>
@@ -3828,7 +3842,7 @@
             <a:r>
               <a:rPr lang="en-US" sz="1600" b="1" i="1" spc="-100" kern="0" dirty="0">
                 <a:solidFill>
-                  <a:srgbClr val="A0032A"/>
+                  <a:srgbClr val="1E3A5F"/>
                 </a:solidFill>
                 <a:latin typeface="Georgia" pitchFamily="34" charset="0"/>
                 <a:ea typeface="Georgia" pitchFamily="34" charset="-122"/>
@@ -3867,7 +3881,7 @@
             <a:r>
               <a:rPr lang="en-US" sz="1050" dirty="0">
                 <a:solidFill>
-                  <a:srgbClr val="2C2C29"/>
+                  <a:srgbClr val="2A2A2D"/>
                 </a:solidFill>
                 <a:latin typeface="Calibri" pitchFamily="34" charset="0"/>
                 <a:ea typeface="Calibri" pitchFamily="34" charset="-122"/>
@@ -3906,11 +3920,11 @@
             <a:r>
               <a:rPr lang="en-US" sz="800" spc="600" kern="0" dirty="0">
                 <a:solidFill>
-                  <a:srgbClr val="6B665E"/>
-                </a:solidFill>
-                <a:latin typeface="Consolas" pitchFamily="34" charset="0"/>
-                <a:ea typeface="Consolas" pitchFamily="34" charset="-122"/>
-                <a:cs typeface="Consolas" pitchFamily="34" charset="-120"/>
+                  <a:srgbClr val="6E6B66"/>
+                </a:solidFill>
+                <a:latin typeface="Calibri" pitchFamily="34" charset="0"/>
+                <a:ea typeface="Calibri" pitchFamily="34" charset="-122"/>
+                <a:cs typeface="Calibri" pitchFamily="34" charset="-120"/>
               </a:rPr>
               <a:t>/ 02</a:t>
             </a:r>
@@ -3945,7 +3959,7 @@
             <a:r>
               <a:rPr lang="en-US" sz="1600" b="1" spc="-100" kern="0" dirty="0">
                 <a:solidFill>
-                  <a:srgbClr val="1A1A17"/>
+                  <a:srgbClr val="17171A"/>
                 </a:solidFill>
                 <a:latin typeface="Georgia" pitchFamily="34" charset="0"/>
                 <a:ea typeface="Georgia" pitchFamily="34" charset="-122"/>
@@ -3959,7 +3973,7 @@
             <a:r>
               <a:rPr lang="en-US" sz="1600" b="1" i="1" spc="-100" kern="0" dirty="0">
                 <a:solidFill>
-                  <a:srgbClr val="A0032A"/>
+                  <a:srgbClr val="1E3A5F"/>
                 </a:solidFill>
                 <a:latin typeface="Georgia" pitchFamily="34" charset="0"/>
                 <a:ea typeface="Georgia" pitchFamily="34" charset="-122"/>
@@ -3998,7 +4012,7 @@
             <a:r>
               <a:rPr lang="en-US" sz="1050" dirty="0">
                 <a:solidFill>
-                  <a:srgbClr val="2C2C29"/>
+                  <a:srgbClr val="2A2A2D"/>
                 </a:solidFill>
                 <a:latin typeface="Calibri" pitchFamily="34" charset="0"/>
                 <a:ea typeface="Calibri" pitchFamily="34" charset="-122"/>
@@ -4037,11 +4051,11 @@
             <a:r>
               <a:rPr lang="en-US" sz="800" spc="600" kern="0" dirty="0">
                 <a:solidFill>
-                  <a:srgbClr val="6B665E"/>
-                </a:solidFill>
-                <a:latin typeface="Consolas" pitchFamily="34" charset="0"/>
-                <a:ea typeface="Consolas" pitchFamily="34" charset="-122"/>
-                <a:cs typeface="Consolas" pitchFamily="34" charset="-120"/>
+                  <a:srgbClr val="6E6B66"/>
+                </a:solidFill>
+                <a:latin typeface="Calibri" pitchFamily="34" charset="0"/>
+                <a:ea typeface="Calibri" pitchFamily="34" charset="-122"/>
+                <a:cs typeface="Calibri" pitchFamily="34" charset="-120"/>
               </a:rPr>
               <a:t>/ 03</a:t>
             </a:r>
@@ -4076,7 +4090,7 @@
             <a:r>
               <a:rPr lang="en-US" sz="1600" b="1" spc="-100" kern="0" dirty="0">
                 <a:solidFill>
-                  <a:srgbClr val="1A1A17"/>
+                  <a:srgbClr val="17171A"/>
                 </a:solidFill>
                 <a:latin typeface="Georgia" pitchFamily="34" charset="0"/>
                 <a:ea typeface="Georgia" pitchFamily="34" charset="-122"/>
@@ -4090,7 +4104,7 @@
             <a:r>
               <a:rPr lang="en-US" sz="1600" b="1" i="1" spc="-100" kern="0" dirty="0">
                 <a:solidFill>
-                  <a:srgbClr val="A0032A"/>
+                  <a:srgbClr val="1E3A5F"/>
                 </a:solidFill>
                 <a:latin typeface="Georgia" pitchFamily="34" charset="0"/>
                 <a:ea typeface="Georgia" pitchFamily="34" charset="-122"/>
@@ -4129,7 +4143,7 @@
             <a:r>
               <a:rPr lang="en-US" sz="1050" dirty="0">
                 <a:solidFill>
-                  <a:srgbClr val="2C2C29"/>
+                  <a:srgbClr val="2A2A2D"/>
                 </a:solidFill>
                 <a:latin typeface="Calibri" pitchFamily="34" charset="0"/>
                 <a:ea typeface="Calibri" pitchFamily="34" charset="-122"/>
@@ -4155,7 +4169,7 @@
     <p:bg>
       <p:bgPr>
         <a:solidFill>
-          <a:srgbClr val="FFF1E5"/>
+          <a:srgbClr val="F7F4EF"/>
         </a:solidFill>
       </p:bgPr>
     </p:bg>
@@ -4188,7 +4202,7 @@
             <a:avLst/>
           </a:prstGeom>
           <a:solidFill>
-            <a:srgbClr val="1A1A17"/>
+            <a:srgbClr val="17171A"/>
           </a:solidFill>
           <a:ln/>
         </p:spPr>
@@ -4220,11 +4234,11 @@
             <a:r>
               <a:rPr lang="en-US" sz="900" b="1" spc="400" kern="0" dirty="0">
                 <a:solidFill>
-                  <a:srgbClr val="A0032A"/>
-                </a:solidFill>
-                <a:latin typeface="Consolas" pitchFamily="34" charset="0"/>
-                <a:ea typeface="Consolas" pitchFamily="34" charset="-122"/>
-                <a:cs typeface="Consolas" pitchFamily="34" charset="-120"/>
+                  <a:srgbClr val="1E3A5F"/>
+                </a:solidFill>
+                <a:latin typeface="Calibri" pitchFamily="34" charset="0"/>
+                <a:ea typeface="Calibri" pitchFamily="34" charset="-122"/>
+                <a:cs typeface="Calibri" pitchFamily="34" charset="-120"/>
               </a:rPr>
               <a:t>§ 03   </a:t>
             </a:r>
@@ -4234,11 +4248,11 @@
             <a:r>
               <a:rPr lang="en-US" sz="900" spc="400" kern="0" dirty="0">
                 <a:solidFill>
-                  <a:srgbClr val="1A1A17"/>
-                </a:solidFill>
-                <a:latin typeface="Consolas" pitchFamily="34" charset="0"/>
-                <a:ea typeface="Consolas" pitchFamily="34" charset="-122"/>
-                <a:cs typeface="Consolas" pitchFamily="34" charset="-120"/>
+                  <a:srgbClr val="17171A"/>
+                </a:solidFill>
+                <a:latin typeface="Calibri" pitchFamily="34" charset="0"/>
+                <a:ea typeface="Calibri" pitchFamily="34" charset="-122"/>
+                <a:cs typeface="Calibri" pitchFamily="34" charset="-120"/>
               </a:rPr>
               <a:t>ROLE SNAPSHOT</a:t>
             </a:r>
@@ -4273,11 +4287,11 @@
             <a:r>
               <a:rPr lang="en-US" sz="900" spc="400" kern="0" dirty="0">
                 <a:solidFill>
-                  <a:srgbClr val="6B665E"/>
-                </a:solidFill>
-                <a:latin typeface="Consolas" pitchFamily="34" charset="0"/>
-                <a:ea typeface="Consolas" pitchFamily="34" charset="-122"/>
-                <a:cs typeface="Consolas" pitchFamily="34" charset="-120"/>
+                  <a:srgbClr val="6E6B66"/>
+                </a:solidFill>
+                <a:latin typeface="Calibri" pitchFamily="34" charset="0"/>
+                <a:ea typeface="Calibri" pitchFamily="34" charset="-122"/>
+                <a:cs typeface="Calibri" pitchFamily="34" charset="-120"/>
               </a:rPr>
               <a:t>THOMAS MCCOY — THE LEDGER, VOL. I</a:t>
             </a:r>
@@ -4300,7 +4314,7 @@
             <a:avLst/>
           </a:prstGeom>
           <a:solidFill>
-            <a:srgbClr val="1A1A17"/>
+            <a:srgbClr val="17171A"/>
           </a:solidFill>
           <a:ln/>
         </p:spPr>
@@ -4332,11 +4346,11 @@
             <a:r>
               <a:rPr lang="en-US" sz="800" dirty="0">
                 <a:solidFill>
-                  <a:srgbClr val="6B665E"/>
-                </a:solidFill>
-                <a:latin typeface="Consolas" pitchFamily="34" charset="0"/>
-                <a:ea typeface="Consolas" pitchFamily="34" charset="-122"/>
-                <a:cs typeface="Consolas" pitchFamily="34" charset="-120"/>
+                  <a:srgbClr val="6E6B66"/>
+                </a:solidFill>
+                <a:latin typeface="Calibri" pitchFamily="34" charset="0"/>
+                <a:ea typeface="Calibri" pitchFamily="34" charset="-122"/>
+                <a:cs typeface="Calibri" pitchFamily="34" charset="-120"/>
               </a:rPr>
               <a:t>tpmccoy2020@gmail.com  ·  480.828.1125  ·  Gilbert, AZ</a:t>
             </a:r>
@@ -4371,11 +4385,11 @@
             <a:r>
               <a:rPr lang="en-US" sz="800" spc="400" kern="0" dirty="0">
                 <a:solidFill>
-                  <a:srgbClr val="6B665E"/>
-                </a:solidFill>
-                <a:latin typeface="Consolas" pitchFamily="34" charset="0"/>
-                <a:ea typeface="Consolas" pitchFamily="34" charset="-122"/>
-                <a:cs typeface="Consolas" pitchFamily="34" charset="-120"/>
+                  <a:srgbClr val="6E6B66"/>
+                </a:solidFill>
+                <a:latin typeface="Calibri" pitchFamily="34" charset="0"/>
+                <a:ea typeface="Calibri" pitchFamily="34" charset="-122"/>
+                <a:cs typeface="Calibri" pitchFamily="34" charset="-120"/>
               </a:rPr>
               <a:t>PORTFOLIO № 02   /   03 OF 10</a:t>
             </a:r>
@@ -4410,7 +4424,7 @@
             <a:r>
               <a:rPr lang="en-US" sz="4400" b="1" spc="-100" kern="0" dirty="0">
                 <a:solidFill>
-                  <a:srgbClr val="1A1A17"/>
+                  <a:srgbClr val="17171A"/>
                 </a:solidFill>
                 <a:latin typeface="Georgia" pitchFamily="34" charset="0"/>
                 <a:ea typeface="Georgia" pitchFamily="34" charset="-122"/>
@@ -4424,7 +4438,7 @@
             <a:r>
               <a:rPr lang="en-US" sz="4400" b="1" spc="-100" kern="0" dirty="0">
                 <a:solidFill>
-                  <a:srgbClr val="C8A04A"/>
+                  <a:srgbClr val="A8C5E8"/>
                 </a:solidFill>
                 <a:latin typeface="Georgia" pitchFamily="34" charset="0"/>
                 <a:ea typeface="Georgia" pitchFamily="34" charset="-122"/>
@@ -4438,7 +4452,7 @@
             <a:r>
               <a:rPr lang="en-US" sz="4400" b="1" i="1" spc="-100" kern="0" dirty="0">
                 <a:solidFill>
-                  <a:srgbClr val="1A1A17"/>
+                  <a:srgbClr val="17171A"/>
                 </a:solidFill>
                 <a:latin typeface="Georgia" pitchFamily="34" charset="0"/>
                 <a:ea typeface="Georgia" pitchFamily="34" charset="-122"/>
@@ -4477,11 +4491,11 @@
             <a:r>
               <a:rPr lang="en-US" sz="1000" spc="1000" kern="0" dirty="0">
                 <a:solidFill>
-                  <a:srgbClr val="A0032A"/>
-                </a:solidFill>
-                <a:latin typeface="Consolas" pitchFamily="34" charset="0"/>
-                <a:ea typeface="Consolas" pitchFamily="34" charset="-122"/>
-                <a:cs typeface="Consolas" pitchFamily="34" charset="-120"/>
+                  <a:srgbClr val="1E3A5F"/>
+                </a:solidFill>
+                <a:latin typeface="Calibri" pitchFamily="34" charset="0"/>
+                <a:ea typeface="Calibri" pitchFamily="34" charset="-122"/>
+                <a:cs typeface="Calibri" pitchFamily="34" charset="-120"/>
               </a:rPr>
               <a:t>STATE OF ARIZONA  ·  GOVERNOR'S OFFICE  ·  2021 — PRESENT</a:t>
             </a:r>
@@ -4504,7 +4518,7 @@
             <a:avLst/>
           </a:prstGeom>
           <a:solidFill>
-            <a:srgbClr val="1A1A17"/>
+            <a:srgbClr val="17171A"/>
           </a:solidFill>
           <a:ln/>
         </p:spPr>
@@ -4524,11 +4538,11 @@
             <a:avLst/>
           </a:prstGeom>
           <a:solidFill>
-            <a:srgbClr val="F4ECDF"/>
+            <a:srgbClr val="EDE8DE"/>
           </a:solidFill>
           <a:ln w="9525">
             <a:solidFill>
-              <a:srgbClr val="1A1A17"/>
+              <a:srgbClr val="17171A"/>
             </a:solidFill>
             <a:prstDash val="solid"/>
           </a:ln>
@@ -4549,7 +4563,7 @@
             <a:avLst/>
           </a:prstGeom>
           <a:solidFill>
-            <a:srgbClr val="A0032A"/>
+            <a:srgbClr val="1E3A5F"/>
           </a:solidFill>
           <a:ln/>
         </p:spPr>
@@ -4581,7 +4595,7 @@
             <a:r>
               <a:rPr lang="en-US" sz="1600" b="1" spc="-100" kern="0" dirty="0">
                 <a:solidFill>
-                  <a:srgbClr val="1A1A17"/>
+                  <a:srgbClr val="17171A"/>
                 </a:solidFill>
                 <a:latin typeface="Georgia" pitchFamily="34" charset="0"/>
                 <a:ea typeface="Georgia" pitchFamily="34" charset="-122"/>
@@ -4620,7 +4634,7 @@
             <a:r>
               <a:rPr lang="en-US" sz="1100" dirty="0">
                 <a:solidFill>
-                  <a:srgbClr val="2C2C29"/>
+                  <a:srgbClr val="2A2A2D"/>
                 </a:solidFill>
                 <a:latin typeface="Calibri" pitchFamily="34" charset="0"/>
                 <a:ea typeface="Calibri" pitchFamily="34" charset="-122"/>
@@ -4647,11 +4661,11 @@
             <a:avLst/>
           </a:prstGeom>
           <a:solidFill>
-            <a:srgbClr val="F4ECDF"/>
+            <a:srgbClr val="EDE8DE"/>
           </a:solidFill>
           <a:ln w="9525">
             <a:solidFill>
-              <a:srgbClr val="1A1A17"/>
+              <a:srgbClr val="17171A"/>
             </a:solidFill>
             <a:prstDash val="solid"/>
           </a:ln>
@@ -4672,7 +4686,7 @@
             <a:avLst/>
           </a:prstGeom>
           <a:solidFill>
-            <a:srgbClr val="A0032A"/>
+            <a:srgbClr val="1E3A5F"/>
           </a:solidFill>
           <a:ln/>
         </p:spPr>
@@ -4704,7 +4718,7 @@
             <a:r>
               <a:rPr lang="en-US" sz="1600" b="1" spc="-100" kern="0" dirty="0">
                 <a:solidFill>
-                  <a:srgbClr val="1A1A17"/>
+                  <a:srgbClr val="17171A"/>
                 </a:solidFill>
                 <a:latin typeface="Georgia" pitchFamily="34" charset="0"/>
                 <a:ea typeface="Georgia" pitchFamily="34" charset="-122"/>
@@ -4743,7 +4757,7 @@
             <a:r>
               <a:rPr lang="en-US" sz="1100" dirty="0">
                 <a:solidFill>
-                  <a:srgbClr val="2C2C29"/>
+                  <a:srgbClr val="2A2A2D"/>
                 </a:solidFill>
                 <a:latin typeface="Calibri" pitchFamily="34" charset="0"/>
                 <a:ea typeface="Calibri" pitchFamily="34" charset="-122"/>
@@ -4770,11 +4784,11 @@
             <a:avLst/>
           </a:prstGeom>
           <a:solidFill>
-            <a:srgbClr val="F4ECDF"/>
+            <a:srgbClr val="EDE8DE"/>
           </a:solidFill>
           <a:ln w="9525">
             <a:solidFill>
-              <a:srgbClr val="1A1A17"/>
+              <a:srgbClr val="17171A"/>
             </a:solidFill>
             <a:prstDash val="solid"/>
           </a:ln>
@@ -4795,7 +4809,7 @@
             <a:avLst/>
           </a:prstGeom>
           <a:solidFill>
-            <a:srgbClr val="A0032A"/>
+            <a:srgbClr val="1E3A5F"/>
           </a:solidFill>
           <a:ln/>
         </p:spPr>
@@ -4827,7 +4841,7 @@
             <a:r>
               <a:rPr lang="en-US" sz="1600" b="1" spc="-100" kern="0" dirty="0">
                 <a:solidFill>
-                  <a:srgbClr val="1A1A17"/>
+                  <a:srgbClr val="17171A"/>
                 </a:solidFill>
                 <a:latin typeface="Georgia" pitchFamily="34" charset="0"/>
                 <a:ea typeface="Georgia" pitchFamily="34" charset="-122"/>
@@ -4866,7 +4880,7 @@
             <a:r>
               <a:rPr lang="en-US" sz="1100" dirty="0">
                 <a:solidFill>
-                  <a:srgbClr val="2C2C29"/>
+                  <a:srgbClr val="2A2A2D"/>
                 </a:solidFill>
                 <a:latin typeface="Calibri" pitchFamily="34" charset="0"/>
                 <a:ea typeface="Calibri" pitchFamily="34" charset="-122"/>
@@ -4893,11 +4907,11 @@
             <a:avLst/>
           </a:prstGeom>
           <a:solidFill>
-            <a:srgbClr val="F4ECDF"/>
+            <a:srgbClr val="EDE8DE"/>
           </a:solidFill>
           <a:ln w="9525">
             <a:solidFill>
-              <a:srgbClr val="1A1A17"/>
+              <a:srgbClr val="17171A"/>
             </a:solidFill>
             <a:prstDash val="solid"/>
           </a:ln>
@@ -4918,7 +4932,7 @@
             <a:avLst/>
           </a:prstGeom>
           <a:solidFill>
-            <a:srgbClr val="A0032A"/>
+            <a:srgbClr val="1E3A5F"/>
           </a:solidFill>
           <a:ln/>
         </p:spPr>
@@ -4950,7 +4964,7 @@
             <a:r>
               <a:rPr lang="en-US" sz="1600" b="1" spc="-100" kern="0" dirty="0">
                 <a:solidFill>
-                  <a:srgbClr val="1A1A17"/>
+                  <a:srgbClr val="17171A"/>
                 </a:solidFill>
                 <a:latin typeface="Georgia" pitchFamily="34" charset="0"/>
                 <a:ea typeface="Georgia" pitchFamily="34" charset="-122"/>
@@ -4989,7 +5003,7 @@
             <a:r>
               <a:rPr lang="en-US" sz="1100" dirty="0">
                 <a:solidFill>
-                  <a:srgbClr val="2C2C29"/>
+                  <a:srgbClr val="2A2A2D"/>
                 </a:solidFill>
                 <a:latin typeface="Calibri" pitchFamily="34" charset="0"/>
                 <a:ea typeface="Calibri" pitchFamily="34" charset="-122"/>
@@ -5016,11 +5030,11 @@
             <a:avLst/>
           </a:prstGeom>
           <a:solidFill>
-            <a:srgbClr val="F4ECDF"/>
+            <a:srgbClr val="EDE8DE"/>
           </a:solidFill>
           <a:ln w="9525">
             <a:solidFill>
-              <a:srgbClr val="1A1A17"/>
+              <a:srgbClr val="17171A"/>
             </a:solidFill>
             <a:prstDash val="solid"/>
           </a:ln>
@@ -5041,7 +5055,7 @@
             <a:avLst/>
           </a:prstGeom>
           <a:solidFill>
-            <a:srgbClr val="A0032A"/>
+            <a:srgbClr val="1E3A5F"/>
           </a:solidFill>
           <a:ln/>
         </p:spPr>
@@ -5073,7 +5087,7 @@
             <a:r>
               <a:rPr lang="en-US" sz="1600" b="1" spc="-100" kern="0" dirty="0">
                 <a:solidFill>
-                  <a:srgbClr val="1A1A17"/>
+                  <a:srgbClr val="17171A"/>
                 </a:solidFill>
                 <a:latin typeface="Georgia" pitchFamily="34" charset="0"/>
                 <a:ea typeface="Georgia" pitchFamily="34" charset="-122"/>
@@ -5112,7 +5126,7 @@
             <a:r>
               <a:rPr lang="en-US" sz="1100" dirty="0">
                 <a:solidFill>
-                  <a:srgbClr val="2C2C29"/>
+                  <a:srgbClr val="2A2A2D"/>
                 </a:solidFill>
                 <a:latin typeface="Calibri" pitchFamily="34" charset="0"/>
                 <a:ea typeface="Calibri" pitchFamily="34" charset="-122"/>
@@ -5139,11 +5153,11 @@
             <a:avLst/>
           </a:prstGeom>
           <a:solidFill>
-            <a:srgbClr val="F4ECDF"/>
+            <a:srgbClr val="EDE8DE"/>
           </a:solidFill>
           <a:ln w="9525">
             <a:solidFill>
-              <a:srgbClr val="1A1A17"/>
+              <a:srgbClr val="17171A"/>
             </a:solidFill>
             <a:prstDash val="solid"/>
           </a:ln>
@@ -5164,7 +5178,7 @@
             <a:avLst/>
           </a:prstGeom>
           <a:solidFill>
-            <a:srgbClr val="A0032A"/>
+            <a:srgbClr val="1E3A5F"/>
           </a:solidFill>
           <a:ln/>
         </p:spPr>
@@ -5196,7 +5210,7 @@
             <a:r>
               <a:rPr lang="en-US" sz="1600" b="1" spc="-100" kern="0" dirty="0">
                 <a:solidFill>
-                  <a:srgbClr val="1A1A17"/>
+                  <a:srgbClr val="17171A"/>
                 </a:solidFill>
                 <a:latin typeface="Georgia" pitchFamily="34" charset="0"/>
                 <a:ea typeface="Georgia" pitchFamily="34" charset="-122"/>
@@ -5235,7 +5249,7 @@
             <a:r>
               <a:rPr lang="en-US" sz="1100" dirty="0">
                 <a:solidFill>
-                  <a:srgbClr val="2C2C29"/>
+                  <a:srgbClr val="2A2A2D"/>
                 </a:solidFill>
                 <a:latin typeface="Calibri" pitchFamily="34" charset="0"/>
                 <a:ea typeface="Calibri" pitchFamily="34" charset="-122"/>
@@ -5261,7 +5275,7 @@
     <p:bg>
       <p:bgPr>
         <a:solidFill>
-          <a:srgbClr val="1A1A17"/>
+          <a:srgbClr val="1E3A5F"/>
         </a:solidFill>
       </p:bgPr>
     </p:bg>
@@ -5294,7 +5308,7 @@
             <a:avLst/>
           </a:prstGeom>
           <a:solidFill>
-            <a:srgbClr val="FFF1E5"/>
+            <a:srgbClr val="F7F4EF"/>
           </a:solidFill>
           <a:ln/>
         </p:spPr>
@@ -5326,11 +5340,11 @@
             <a:r>
               <a:rPr lang="en-US" sz="900" b="1" spc="400" kern="0" dirty="0">
                 <a:solidFill>
-                  <a:srgbClr val="C8A04A"/>
-                </a:solidFill>
-                <a:latin typeface="Consolas" pitchFamily="34" charset="0"/>
-                <a:ea typeface="Consolas" pitchFamily="34" charset="-122"/>
-                <a:cs typeface="Consolas" pitchFamily="34" charset="-120"/>
+                  <a:srgbClr val="A8C5E8"/>
+                </a:solidFill>
+                <a:latin typeface="Calibri" pitchFamily="34" charset="0"/>
+                <a:ea typeface="Calibri" pitchFamily="34" charset="-122"/>
+                <a:cs typeface="Calibri" pitchFamily="34" charset="-120"/>
               </a:rPr>
               <a:t>§ 04   </a:t>
             </a:r>
@@ -5340,11 +5354,11 @@
             <a:r>
               <a:rPr lang="en-US" sz="900" spc="400" kern="0" dirty="0">
                 <a:solidFill>
-                  <a:srgbClr val="FFF1E5"/>
-                </a:solidFill>
-                <a:latin typeface="Consolas" pitchFamily="34" charset="0"/>
-                <a:ea typeface="Consolas" pitchFamily="34" charset="-122"/>
-                <a:cs typeface="Consolas" pitchFamily="34" charset="-120"/>
+                  <a:srgbClr val="F7F4EF"/>
+                </a:solidFill>
+                <a:latin typeface="Calibri" pitchFamily="34" charset="0"/>
+                <a:ea typeface="Calibri" pitchFamily="34" charset="-122"/>
+                <a:cs typeface="Calibri" pitchFamily="34" charset="-120"/>
               </a:rPr>
               <a:t>THE BIG NUMBER — PUBLIC FUNDS UNDER MANAGEMENT</a:t>
             </a:r>
@@ -5379,11 +5393,11 @@
             <a:r>
               <a:rPr lang="en-US" sz="900" spc="400" kern="0" dirty="0">
                 <a:solidFill>
-                  <a:srgbClr val="C8A04A"/>
-                </a:solidFill>
-                <a:latin typeface="Consolas" pitchFamily="34" charset="0"/>
-                <a:ea typeface="Consolas" pitchFamily="34" charset="-122"/>
-                <a:cs typeface="Consolas" pitchFamily="34" charset="-120"/>
+                  <a:srgbClr val="A8C5E8"/>
+                </a:solidFill>
+                <a:latin typeface="Calibri" pitchFamily="34" charset="0"/>
+                <a:ea typeface="Calibri" pitchFamily="34" charset="-122"/>
+                <a:cs typeface="Calibri" pitchFamily="34" charset="-120"/>
               </a:rPr>
               <a:t>THOMAS MCCOY — THE LEDGER, VOL. I</a:t>
             </a:r>
@@ -5418,11 +5432,11 @@
             <a:r>
               <a:rPr lang="en-US" sz="1400" spc="1000" kern="0" dirty="0">
                 <a:solidFill>
-                  <a:srgbClr val="C8A04A"/>
-                </a:solidFill>
-                <a:latin typeface="Consolas" pitchFamily="34" charset="0"/>
-                <a:ea typeface="Consolas" pitchFamily="34" charset="-122"/>
-                <a:cs typeface="Consolas" pitchFamily="34" charset="-120"/>
+                  <a:srgbClr val="A8C5E8"/>
+                </a:solidFill>
+                <a:latin typeface="Calibri" pitchFamily="34" charset="0"/>
+                <a:ea typeface="Calibri" pitchFamily="34" charset="-122"/>
+                <a:cs typeface="Calibri" pitchFamily="34" charset="-120"/>
               </a:rPr>
               <a:t>MANAGED &amp; RECONCILED</a:t>
             </a:r>
@@ -5457,7 +5471,7 @@
             <a:r>
               <a:rPr lang="en-US" sz="13000" b="1" spc="-400" kern="0" dirty="0">
                 <a:solidFill>
-                  <a:srgbClr val="C8A04A"/>
+                  <a:srgbClr val="A8C5E8"/>
                 </a:solidFill>
                 <a:latin typeface="Georgia" pitchFamily="34" charset="0"/>
                 <a:ea typeface="Georgia" pitchFamily="34" charset="-122"/>
@@ -5471,7 +5485,7 @@
             <a:r>
               <a:rPr lang="en-US" sz="20000" b="1" spc="-400" kern="0" dirty="0">
                 <a:solidFill>
-                  <a:srgbClr val="FFF1E5"/>
+                  <a:srgbClr val="F7F4EF"/>
                 </a:solidFill>
                 <a:latin typeface="Georgia" pitchFamily="34" charset="0"/>
                 <a:ea typeface="Georgia" pitchFamily="34" charset="-122"/>
@@ -5485,7 +5499,7 @@
             <a:r>
               <a:rPr lang="en-US" sz="20000" b="1" i="1" spc="-400" kern="0" dirty="0">
                 <a:solidFill>
-                  <a:srgbClr val="FFF1E5"/>
+                  <a:srgbClr val="F7F4EF"/>
                 </a:solidFill>
                 <a:latin typeface="Georgia" pitchFamily="34" charset="0"/>
                 <a:ea typeface="Georgia" pitchFamily="34" charset="-122"/>
@@ -5499,7 +5513,7 @@
             <a:r>
               <a:rPr lang="en-US" sz="13000" b="1" spc="-400" kern="0" dirty="0">
                 <a:solidFill>
-                  <a:srgbClr val="A0032A"/>
+                  <a:srgbClr val="1E3A5F"/>
                 </a:solidFill>
                 <a:latin typeface="Georgia" pitchFamily="34" charset="0"/>
                 <a:ea typeface="Georgia" pitchFamily="34" charset="-122"/>
@@ -5538,11 +5552,11 @@
             <a:r>
               <a:rPr lang="en-US" sz="900" spc="800" kern="0" dirty="0">
                 <a:solidFill>
-                  <a:srgbClr val="C8A04A"/>
-                </a:solidFill>
-                <a:latin typeface="Consolas" pitchFamily="34" charset="0"/>
-                <a:ea typeface="Consolas" pitchFamily="34" charset="-122"/>
-                <a:cs typeface="Consolas" pitchFamily="34" charset="-120"/>
+                  <a:srgbClr val="A8C5E8"/>
+                </a:solidFill>
+                <a:latin typeface="Calibri" pitchFamily="34" charset="0"/>
+                <a:ea typeface="Calibri" pitchFamily="34" charset="-122"/>
+                <a:cs typeface="Calibri" pitchFamily="34" charset="-120"/>
               </a:rPr>
               <a:t>CONTEXT</a:t>
             </a:r>
@@ -5577,7 +5591,7 @@
             <a:r>
               <a:rPr lang="en-US" sz="1150" dirty="0">
                 <a:solidFill>
-                  <a:srgbClr val="FFF1E5"/>
+                  <a:srgbClr val="F7F4EF"/>
                 </a:solidFill>
                 <a:latin typeface="Calibri" pitchFamily="34" charset="0"/>
                 <a:ea typeface="Calibri" pitchFamily="34" charset="-122"/>
@@ -5608,7 +5622,7 @@
           </a:solidFill>
           <a:ln w="6350">
             <a:solidFill>
-              <a:srgbClr val="C8A04A"/>
+              <a:srgbClr val="A8C5E8"/>
             </a:solidFill>
             <a:prstDash val="solid"/>
           </a:ln>
@@ -5641,7 +5655,7 @@
             <a:r>
               <a:rPr lang="en-US" sz="1400" b="1" dirty="0">
                 <a:solidFill>
-                  <a:srgbClr val="FFF1E5"/>
+                  <a:srgbClr val="F7F4EF"/>
                 </a:solidFill>
                 <a:latin typeface="Georgia" pitchFamily="34" charset="0"/>
                 <a:ea typeface="Georgia" pitchFamily="34" charset="-122"/>
@@ -5680,11 +5694,11 @@
             <a:r>
               <a:rPr lang="en-US" sz="800" spc="600" kern="0" dirty="0">
                 <a:solidFill>
-                  <a:srgbClr val="C8A04A"/>
-                </a:solidFill>
-                <a:latin typeface="Consolas" pitchFamily="34" charset="0"/>
-                <a:ea typeface="Consolas" pitchFamily="34" charset="-122"/>
-                <a:cs typeface="Consolas" pitchFamily="34" charset="-120"/>
+                  <a:srgbClr val="A8C5E8"/>
+                </a:solidFill>
+                <a:latin typeface="Calibri" pitchFamily="34" charset="0"/>
+                <a:ea typeface="Calibri" pitchFamily="34" charset="-122"/>
+                <a:cs typeface="Calibri" pitchFamily="34" charset="-120"/>
               </a:rPr>
               <a:t>Federal Uniform Guidance</a:t>
             </a:r>
@@ -5711,7 +5725,7 @@
           </a:solidFill>
           <a:ln w="6350">
             <a:solidFill>
-              <a:srgbClr val="C8A04A"/>
+              <a:srgbClr val="A8C5E8"/>
             </a:solidFill>
             <a:prstDash val="solid"/>
           </a:ln>
@@ -5744,7 +5758,7 @@
             <a:r>
               <a:rPr lang="en-US" sz="1400" b="1" dirty="0">
                 <a:solidFill>
-                  <a:srgbClr val="FFF1E5"/>
+                  <a:srgbClr val="F7F4EF"/>
                 </a:solidFill>
                 <a:latin typeface="Georgia" pitchFamily="34" charset="0"/>
                 <a:ea typeface="Georgia" pitchFamily="34" charset="-122"/>
@@ -5783,11 +5797,11 @@
             <a:r>
               <a:rPr lang="en-US" sz="800" spc="600" kern="0" dirty="0">
                 <a:solidFill>
-                  <a:srgbClr val="C8A04A"/>
-                </a:solidFill>
-                <a:latin typeface="Consolas" pitchFamily="34" charset="0"/>
-                <a:ea typeface="Consolas" pitchFamily="34" charset="-122"/>
-                <a:cs typeface="Consolas" pitchFamily="34" charset="-120"/>
+                  <a:srgbClr val="A8C5E8"/>
+                </a:solidFill>
+                <a:latin typeface="Calibri" pitchFamily="34" charset="0"/>
+                <a:ea typeface="Calibri" pitchFamily="34" charset="-122"/>
+                <a:cs typeface="Calibri" pitchFamily="34" charset="-120"/>
               </a:rPr>
               <a:t>Accounting Standard</a:t>
             </a:r>
@@ -5814,7 +5828,7 @@
           </a:solidFill>
           <a:ln w="6350">
             <a:solidFill>
-              <a:srgbClr val="C8A04A"/>
+              <a:srgbClr val="A8C5E8"/>
             </a:solidFill>
             <a:prstDash val="solid"/>
           </a:ln>
@@ -5847,7 +5861,7 @@
             <a:r>
               <a:rPr lang="en-US" sz="1400" b="1" dirty="0">
                 <a:solidFill>
-                  <a:srgbClr val="FFF1E5"/>
+                  <a:srgbClr val="F7F4EF"/>
                 </a:solidFill>
                 <a:latin typeface="Georgia" pitchFamily="34" charset="0"/>
                 <a:ea typeface="Georgia" pitchFamily="34" charset="-122"/>
@@ -5886,11 +5900,11 @@
             <a:r>
               <a:rPr lang="en-US" sz="800" spc="600" kern="0" dirty="0">
                 <a:solidFill>
-                  <a:srgbClr val="C8A04A"/>
-                </a:solidFill>
-                <a:latin typeface="Consolas" pitchFamily="34" charset="0"/>
-                <a:ea typeface="Consolas" pitchFamily="34" charset="-122"/>
-                <a:cs typeface="Consolas" pitchFamily="34" charset="-120"/>
+                  <a:srgbClr val="A8C5E8"/>
+                </a:solidFill>
+                <a:latin typeface="Calibri" pitchFamily="34" charset="0"/>
+                <a:ea typeface="Calibri" pitchFamily="34" charset="-122"/>
+                <a:cs typeface="Calibri" pitchFamily="34" charset="-120"/>
               </a:rPr>
               <a:t>State Regulation</a:t>
             </a:r>
@@ -5917,7 +5931,7 @@
           </a:solidFill>
           <a:ln w="6350">
             <a:solidFill>
-              <a:srgbClr val="C8A04A"/>
+              <a:srgbClr val="A8C5E8"/>
             </a:solidFill>
             <a:prstDash val="solid"/>
           </a:ln>
@@ -5950,7 +5964,7 @@
             <a:r>
               <a:rPr lang="en-US" sz="1400" b="1" dirty="0">
                 <a:solidFill>
-                  <a:srgbClr val="FFF1E5"/>
+                  <a:srgbClr val="F7F4EF"/>
                 </a:solidFill>
                 <a:latin typeface="Georgia" pitchFamily="34" charset="0"/>
                 <a:ea typeface="Georgia" pitchFamily="34" charset="-122"/>
@@ -5989,11 +6003,11 @@
             <a:r>
               <a:rPr lang="en-US" sz="800" spc="600" kern="0" dirty="0">
                 <a:solidFill>
-                  <a:srgbClr val="C8A04A"/>
-                </a:solidFill>
-                <a:latin typeface="Consolas" pitchFamily="34" charset="0"/>
-                <a:ea typeface="Consolas" pitchFamily="34" charset="-122"/>
-                <a:cs typeface="Consolas" pitchFamily="34" charset="-120"/>
+                  <a:srgbClr val="A8C5E8"/>
+                </a:solidFill>
+                <a:latin typeface="Calibri" pitchFamily="34" charset="0"/>
+                <a:ea typeface="Calibri" pitchFamily="34" charset="-122"/>
+                <a:cs typeface="Calibri" pitchFamily="34" charset="-120"/>
               </a:rPr>
               <a:t>System of Record</a:t>
             </a:r>
@@ -6028,11 +6042,11 @@
             <a:r>
               <a:rPr lang="en-US" sz="800" spc="400" kern="0" dirty="0">
                 <a:solidFill>
-                  <a:srgbClr val="6B665E"/>
-                </a:solidFill>
-                <a:latin typeface="Consolas" pitchFamily="34" charset="0"/>
-                <a:ea typeface="Consolas" pitchFamily="34" charset="-122"/>
-                <a:cs typeface="Consolas" pitchFamily="34" charset="-120"/>
+                  <a:srgbClr val="6E6B66"/>
+                </a:solidFill>
+                <a:latin typeface="Calibri" pitchFamily="34" charset="0"/>
+                <a:ea typeface="Calibri" pitchFamily="34" charset="-122"/>
+                <a:cs typeface="Calibri" pitchFamily="34" charset="-120"/>
               </a:rPr>
               <a:t>SOURCE: AZ360 STATE ACCOUNTING SYSTEM  ·  FY 2021 – PRESENT</a:t>
             </a:r>
@@ -6067,11 +6081,11 @@
             <a:r>
               <a:rPr lang="en-US" sz="800" spc="400" kern="0" dirty="0">
                 <a:solidFill>
-                  <a:srgbClr val="6B665E"/>
-                </a:solidFill>
-                <a:latin typeface="Consolas" pitchFamily="34" charset="0"/>
-                <a:ea typeface="Consolas" pitchFamily="34" charset="-122"/>
-                <a:cs typeface="Consolas" pitchFamily="34" charset="-120"/>
+                  <a:srgbClr val="6E6B66"/>
+                </a:solidFill>
+                <a:latin typeface="Calibri" pitchFamily="34" charset="0"/>
+                <a:ea typeface="Calibri" pitchFamily="34" charset="-122"/>
+                <a:cs typeface="Calibri" pitchFamily="34" charset="-120"/>
               </a:rPr>
               <a:t>PORTFOLIO № 02   /   04 OF 10</a:t>
             </a:r>
@@ -6093,7 +6107,7 @@
     <p:bg>
       <p:bgPr>
         <a:solidFill>
-          <a:srgbClr val="FFF1E5"/>
+          <a:srgbClr val="F7F4EF"/>
         </a:solidFill>
       </p:bgPr>
     </p:bg>
@@ -6126,7 +6140,7 @@
             <a:avLst/>
           </a:prstGeom>
           <a:solidFill>
-            <a:srgbClr val="1A1A17"/>
+            <a:srgbClr val="17171A"/>
           </a:solidFill>
           <a:ln/>
         </p:spPr>
@@ -6158,11 +6172,11 @@
             <a:r>
               <a:rPr lang="en-US" sz="900" b="1" spc="400" kern="0" dirty="0">
                 <a:solidFill>
-                  <a:srgbClr val="A0032A"/>
-                </a:solidFill>
-                <a:latin typeface="Consolas" pitchFamily="34" charset="0"/>
-                <a:ea typeface="Consolas" pitchFamily="34" charset="-122"/>
-                <a:cs typeface="Consolas" pitchFamily="34" charset="-120"/>
+                  <a:srgbClr val="1E3A5F"/>
+                </a:solidFill>
+                <a:latin typeface="Calibri" pitchFamily="34" charset="0"/>
+                <a:ea typeface="Calibri" pitchFamily="34" charset="-122"/>
+                <a:cs typeface="Calibri" pitchFamily="34" charset="-120"/>
               </a:rPr>
               <a:t>§ 05   </a:t>
             </a:r>
@@ -6172,11 +6186,11 @@
             <a:r>
               <a:rPr lang="en-US" sz="900" spc="400" kern="0" dirty="0">
                 <a:solidFill>
-                  <a:srgbClr val="1A1A17"/>
-                </a:solidFill>
-                <a:latin typeface="Consolas" pitchFamily="34" charset="0"/>
-                <a:ea typeface="Consolas" pitchFamily="34" charset="-122"/>
-                <a:cs typeface="Consolas" pitchFamily="34" charset="-120"/>
+                  <a:srgbClr val="17171A"/>
+                </a:solidFill>
+                <a:latin typeface="Calibri" pitchFamily="34" charset="0"/>
+                <a:ea typeface="Calibri" pitchFamily="34" charset="-122"/>
+                <a:cs typeface="Calibri" pitchFamily="34" charset="-120"/>
               </a:rPr>
               <a:t>CASE STUDY — ANNUAL STAKEHOLDER EVENT</a:t>
             </a:r>
@@ -6211,11 +6225,11 @@
             <a:r>
               <a:rPr lang="en-US" sz="900" spc="400" kern="0" dirty="0">
                 <a:solidFill>
-                  <a:srgbClr val="6B665E"/>
-                </a:solidFill>
-                <a:latin typeface="Consolas" pitchFamily="34" charset="0"/>
-                <a:ea typeface="Consolas" pitchFamily="34" charset="-122"/>
-                <a:cs typeface="Consolas" pitchFamily="34" charset="-120"/>
+                  <a:srgbClr val="6E6B66"/>
+                </a:solidFill>
+                <a:latin typeface="Calibri" pitchFamily="34" charset="0"/>
+                <a:ea typeface="Calibri" pitchFamily="34" charset="-122"/>
+                <a:cs typeface="Calibri" pitchFamily="34" charset="-120"/>
               </a:rPr>
               <a:t>THOMAS MCCOY — THE LEDGER, VOL. I</a:t>
             </a:r>
@@ -6238,7 +6252,7 @@
             <a:avLst/>
           </a:prstGeom>
           <a:solidFill>
-            <a:srgbClr val="1A1A17"/>
+            <a:srgbClr val="17171A"/>
           </a:solidFill>
           <a:ln/>
         </p:spPr>
@@ -6270,11 +6284,11 @@
             <a:r>
               <a:rPr lang="en-US" sz="800" dirty="0">
                 <a:solidFill>
-                  <a:srgbClr val="6B665E"/>
-                </a:solidFill>
-                <a:latin typeface="Consolas" pitchFamily="34" charset="0"/>
-                <a:ea typeface="Consolas" pitchFamily="34" charset="-122"/>
-                <a:cs typeface="Consolas" pitchFamily="34" charset="-120"/>
+                  <a:srgbClr val="6E6B66"/>
+                </a:solidFill>
+                <a:latin typeface="Calibri" pitchFamily="34" charset="0"/>
+                <a:ea typeface="Calibri" pitchFamily="34" charset="-122"/>
+                <a:cs typeface="Calibri" pitchFamily="34" charset="-120"/>
               </a:rPr>
               <a:t>tpmccoy2020@gmail.com  ·  480.828.1125  ·  Gilbert, AZ</a:t>
             </a:r>
@@ -6309,11 +6323,11 @@
             <a:r>
               <a:rPr lang="en-US" sz="800" spc="400" kern="0" dirty="0">
                 <a:solidFill>
-                  <a:srgbClr val="6B665E"/>
-                </a:solidFill>
-                <a:latin typeface="Consolas" pitchFamily="34" charset="0"/>
-                <a:ea typeface="Consolas" pitchFamily="34" charset="-122"/>
-                <a:cs typeface="Consolas" pitchFamily="34" charset="-120"/>
+                  <a:srgbClr val="6E6B66"/>
+                </a:solidFill>
+                <a:latin typeface="Calibri" pitchFamily="34" charset="0"/>
+                <a:ea typeface="Calibri" pitchFamily="34" charset="-122"/>
+                <a:cs typeface="Calibri" pitchFamily="34" charset="-120"/>
               </a:rPr>
               <a:t>PORTFOLIO № 02   /   05 OF 10</a:t>
             </a:r>
@@ -6348,7 +6362,7 @@
             <a:r>
               <a:rPr lang="en-US" sz="3800" b="1" spc="-100" kern="0" dirty="0">
                 <a:solidFill>
-                  <a:srgbClr val="1A1A17"/>
+                  <a:srgbClr val="17171A"/>
                 </a:solidFill>
                 <a:latin typeface="Georgia" pitchFamily="34" charset="0"/>
                 <a:ea typeface="Georgia" pitchFamily="34" charset="-122"/>
@@ -6362,7 +6376,7 @@
             <a:r>
               <a:rPr lang="en-US" sz="3800" b="1" i="1" spc="-100" kern="0" dirty="0">
                 <a:solidFill>
-                  <a:srgbClr val="A0032A"/>
+                  <a:srgbClr val="1E3A5F"/>
                 </a:solidFill>
                 <a:latin typeface="Georgia" pitchFamily="34" charset="0"/>
                 <a:ea typeface="Georgia" pitchFamily="34" charset="-122"/>
@@ -6376,7 +6390,7 @@
             <a:r>
               <a:rPr lang="en-US" sz="3800" b="1" spc="-100" kern="0" dirty="0">
                 <a:solidFill>
-                  <a:srgbClr val="1A1A17"/>
+                  <a:srgbClr val="17171A"/>
                 </a:solidFill>
                 <a:latin typeface="Georgia" pitchFamily="34" charset="0"/>
                 <a:ea typeface="Georgia" pitchFamily="34" charset="-122"/>
@@ -6390,7 +6404,7 @@
             <a:r>
               <a:rPr lang="en-US" sz="3800" b="1" spc="-100" kern="0" dirty="0">
                 <a:solidFill>
-                  <a:srgbClr val="1A1A17"/>
+                  <a:srgbClr val="17171A"/>
                 </a:solidFill>
                 <a:latin typeface="Georgia" pitchFamily="34" charset="0"/>
                 <a:ea typeface="Georgia" pitchFamily="34" charset="-122"/>
@@ -6429,11 +6443,11 @@
             <a:r>
               <a:rPr lang="en-US" sz="1000" spc="1000" kern="0" dirty="0">
                 <a:solidFill>
-                  <a:srgbClr val="A0032A"/>
-                </a:solidFill>
-                <a:latin typeface="Consolas" pitchFamily="34" charset="0"/>
-                <a:ea typeface="Consolas" pitchFamily="34" charset="-122"/>
-                <a:cs typeface="Consolas" pitchFamily="34" charset="-120"/>
+                  <a:srgbClr val="1E3A5F"/>
+                </a:solidFill>
+                <a:latin typeface="Calibri" pitchFamily="34" charset="0"/>
+                <a:ea typeface="Calibri" pitchFamily="34" charset="-122"/>
+                <a:cs typeface="Calibri" pitchFamily="34" charset="-120"/>
               </a:rPr>
               <a:t>$60K ANNUAL EVENT  ·  FOUR-YEAR P&amp;L TURNAROUND  ·  DIRECTED BY T. McCOY</a:t>
             </a:r>
@@ -6472,7 +6486,7 @@
             <a:avLst/>
           </a:prstGeom>
           <a:solidFill>
-            <a:srgbClr val="1A1A17"/>
+            <a:srgbClr val="1E3A5F"/>
           </a:solidFill>
           <a:ln/>
         </p:spPr>
@@ -6504,11 +6518,11 @@
             <a:r>
               <a:rPr lang="en-US" sz="900" spc="800" kern="0" dirty="0">
                 <a:solidFill>
-                  <a:srgbClr val="C8A04A"/>
-                </a:solidFill>
-                <a:latin typeface="Consolas" pitchFamily="34" charset="0"/>
-                <a:ea typeface="Consolas" pitchFamily="34" charset="-122"/>
-                <a:cs typeface="Consolas" pitchFamily="34" charset="-120"/>
+                  <a:srgbClr val="A8C5E8"/>
+                </a:solidFill>
+                <a:latin typeface="Calibri" pitchFamily="34" charset="0"/>
+                <a:ea typeface="Calibri" pitchFamily="34" charset="-122"/>
+                <a:cs typeface="Calibri" pitchFamily="34" charset="-120"/>
               </a:rPr>
               <a:t>THE TURNAROUND</a:t>
             </a:r>
@@ -6543,7 +6557,7 @@
             <a:r>
               <a:rPr lang="en-US" sz="13000" b="1" i="1" spc="-400" kern="0" dirty="0">
                 <a:solidFill>
-                  <a:srgbClr val="FFF1E5"/>
+                  <a:srgbClr val="F7F4EF"/>
                 </a:solidFill>
                 <a:latin typeface="Georgia" pitchFamily="34" charset="0"/>
                 <a:ea typeface="Georgia" pitchFamily="34" charset="-122"/>
@@ -6582,11 +6596,11 @@
             <a:r>
               <a:rPr lang="en-US" sz="900" spc="800" kern="0" dirty="0">
                 <a:solidFill>
-                  <a:srgbClr val="C8A04A"/>
-                </a:solidFill>
-                <a:latin typeface="Consolas" pitchFamily="34" charset="0"/>
-                <a:ea typeface="Consolas" pitchFamily="34" charset="-122"/>
-                <a:cs typeface="Consolas" pitchFamily="34" charset="-120"/>
+                  <a:srgbClr val="A8C5E8"/>
+                </a:solidFill>
+                <a:latin typeface="Calibri" pitchFamily="34" charset="0"/>
+                <a:ea typeface="Calibri" pitchFamily="34" charset="-122"/>
+                <a:cs typeface="Calibri" pitchFamily="34" charset="-120"/>
               </a:rPr>
               <a:t>SURPLUS ACHIEVED</a:t>
             </a:r>
@@ -6609,7 +6623,7 @@
             <a:avLst/>
           </a:prstGeom>
           <a:solidFill>
-            <a:srgbClr val="C8A04A"/>
+            <a:srgbClr val="A8C5E8"/>
           </a:solidFill>
           <a:ln/>
         </p:spPr>
@@ -6644,7 +6658,7 @@
             <a:r>
               <a:rPr lang="en-US" sz="1000" dirty="0">
                 <a:solidFill>
-                  <a:srgbClr val="FFF1E5"/>
+                  <a:srgbClr val="F7F4EF"/>
                 </a:solidFill>
                 <a:latin typeface="Calibri" pitchFamily="34" charset="0"/>
                 <a:ea typeface="Calibri" pitchFamily="34" charset="-122"/>
@@ -6664,7 +6678,7 @@
             <a:r>
               <a:rPr lang="en-US" sz="1000" dirty="0">
                 <a:solidFill>
-                  <a:srgbClr val="FFF1E5"/>
+                  <a:srgbClr val="F7F4EF"/>
                 </a:solidFill>
                 <a:latin typeface="Calibri" pitchFamily="34" charset="0"/>
                 <a:ea typeface="Calibri" pitchFamily="34" charset="-122"/>
@@ -6684,7 +6698,7 @@
             <a:r>
               <a:rPr lang="en-US" sz="1000" dirty="0">
                 <a:solidFill>
-                  <a:srgbClr val="FFF1E5"/>
+                  <a:srgbClr val="F7F4EF"/>
                 </a:solidFill>
                 <a:latin typeface="Calibri" pitchFamily="34" charset="0"/>
                 <a:ea typeface="Calibri" pitchFamily="34" charset="-122"/>
@@ -6711,7 +6725,7 @@
             <a:avLst/>
           </a:prstGeom>
           <a:solidFill>
-            <a:srgbClr val="F4ECDF"/>
+            <a:srgbClr val="EDE8DE"/>
           </a:solidFill>
           <a:ln/>
         </p:spPr>
@@ -6743,11 +6757,11 @@
             <a:r>
               <a:rPr lang="en-US" sz="800" spc="600" kern="0" dirty="0">
                 <a:solidFill>
-                  <a:srgbClr val="A0032A"/>
-                </a:solidFill>
-                <a:latin typeface="Consolas" pitchFamily="34" charset="0"/>
-                <a:ea typeface="Consolas" pitchFamily="34" charset="-122"/>
-                <a:cs typeface="Consolas" pitchFamily="34" charset="-120"/>
+                  <a:srgbClr val="1E3A5F"/>
+                </a:solidFill>
+                <a:latin typeface="Calibri" pitchFamily="34" charset="0"/>
+                <a:ea typeface="Calibri" pitchFamily="34" charset="-122"/>
+                <a:cs typeface="Calibri" pitchFamily="34" charset="-120"/>
               </a:rPr>
               <a:t>METHOD</a:t>
             </a:r>
@@ -6782,7 +6796,7 @@
             <a:r>
               <a:rPr lang="en-US" sz="1000" i="1" dirty="0">
                 <a:solidFill>
-                  <a:srgbClr val="1A1A17"/>
+                  <a:srgbClr val="17171A"/>
                 </a:solidFill>
                 <a:latin typeface="Calibri" pitchFamily="34" charset="0"/>
                 <a:ea typeface="Calibri" pitchFamily="34" charset="-122"/>
@@ -6808,7 +6822,7 @@
     <p:bg>
       <p:bgPr>
         <a:solidFill>
-          <a:srgbClr val="FFF1E5"/>
+          <a:srgbClr val="F7F4EF"/>
         </a:solidFill>
       </p:bgPr>
     </p:bg>
@@ -6841,7 +6855,7 @@
             <a:avLst/>
           </a:prstGeom>
           <a:solidFill>
-            <a:srgbClr val="1A1A17"/>
+            <a:srgbClr val="17171A"/>
           </a:solidFill>
           <a:ln/>
         </p:spPr>
@@ -6873,11 +6887,11 @@
             <a:r>
               <a:rPr lang="en-US" sz="900" b="1" spc="400" kern="0" dirty="0">
                 <a:solidFill>
-                  <a:srgbClr val="A0032A"/>
-                </a:solidFill>
-                <a:latin typeface="Consolas" pitchFamily="34" charset="0"/>
-                <a:ea typeface="Consolas" pitchFamily="34" charset="-122"/>
-                <a:cs typeface="Consolas" pitchFamily="34" charset="-120"/>
+                  <a:srgbClr val="1E3A5F"/>
+                </a:solidFill>
+                <a:latin typeface="Calibri" pitchFamily="34" charset="0"/>
+                <a:ea typeface="Calibri" pitchFamily="34" charset="-122"/>
+                <a:cs typeface="Calibri" pitchFamily="34" charset="-120"/>
               </a:rPr>
               <a:t>§ 06   </a:t>
             </a:r>
@@ -6887,11 +6901,11 @@
             <a:r>
               <a:rPr lang="en-US" sz="900" spc="400" kern="0" dirty="0">
                 <a:solidFill>
-                  <a:srgbClr val="1A1A17"/>
-                </a:solidFill>
-                <a:latin typeface="Consolas" pitchFamily="34" charset="0"/>
-                <a:ea typeface="Consolas" pitchFamily="34" charset="-122"/>
-                <a:cs typeface="Consolas" pitchFamily="34" charset="-120"/>
+                  <a:srgbClr val="17171A"/>
+                </a:solidFill>
+                <a:latin typeface="Calibri" pitchFamily="34" charset="0"/>
+                <a:ea typeface="Calibri" pitchFamily="34" charset="-122"/>
+                <a:cs typeface="Calibri" pitchFamily="34" charset="-120"/>
               </a:rPr>
               <a:t>CASE STUDY — GOVERNOR'S OFFICE TRAVEL BUDGET</a:t>
             </a:r>
@@ -6926,11 +6940,11 @@
             <a:r>
               <a:rPr lang="en-US" sz="900" spc="400" kern="0" dirty="0">
                 <a:solidFill>
-                  <a:srgbClr val="6B665E"/>
-                </a:solidFill>
-                <a:latin typeface="Consolas" pitchFamily="34" charset="0"/>
-                <a:ea typeface="Consolas" pitchFamily="34" charset="-122"/>
-                <a:cs typeface="Consolas" pitchFamily="34" charset="-120"/>
+                  <a:srgbClr val="6E6B66"/>
+                </a:solidFill>
+                <a:latin typeface="Calibri" pitchFamily="34" charset="0"/>
+                <a:ea typeface="Calibri" pitchFamily="34" charset="-122"/>
+                <a:cs typeface="Calibri" pitchFamily="34" charset="-120"/>
               </a:rPr>
               <a:t>THOMAS MCCOY — THE LEDGER, VOL. I</a:t>
             </a:r>
@@ -6953,7 +6967,7 @@
             <a:avLst/>
           </a:prstGeom>
           <a:solidFill>
-            <a:srgbClr val="1A1A17"/>
+            <a:srgbClr val="17171A"/>
           </a:solidFill>
           <a:ln/>
         </p:spPr>
@@ -6985,11 +6999,11 @@
             <a:r>
               <a:rPr lang="en-US" sz="800" dirty="0">
                 <a:solidFill>
-                  <a:srgbClr val="6B665E"/>
-                </a:solidFill>
-                <a:latin typeface="Consolas" pitchFamily="34" charset="0"/>
-                <a:ea typeface="Consolas" pitchFamily="34" charset="-122"/>
-                <a:cs typeface="Consolas" pitchFamily="34" charset="-120"/>
+                  <a:srgbClr val="6E6B66"/>
+                </a:solidFill>
+                <a:latin typeface="Calibri" pitchFamily="34" charset="0"/>
+                <a:ea typeface="Calibri" pitchFamily="34" charset="-122"/>
+                <a:cs typeface="Calibri" pitchFamily="34" charset="-120"/>
               </a:rPr>
               <a:t>tpmccoy2020@gmail.com  ·  480.828.1125  ·  Gilbert, AZ</a:t>
             </a:r>
@@ -7024,11 +7038,11 @@
             <a:r>
               <a:rPr lang="en-US" sz="800" spc="400" kern="0" dirty="0">
                 <a:solidFill>
-                  <a:srgbClr val="6B665E"/>
-                </a:solidFill>
-                <a:latin typeface="Consolas" pitchFamily="34" charset="0"/>
-                <a:ea typeface="Consolas" pitchFamily="34" charset="-122"/>
-                <a:cs typeface="Consolas" pitchFamily="34" charset="-120"/>
+                  <a:srgbClr val="6E6B66"/>
+                </a:solidFill>
+                <a:latin typeface="Calibri" pitchFamily="34" charset="0"/>
+                <a:ea typeface="Calibri" pitchFamily="34" charset="-122"/>
+                <a:cs typeface="Calibri" pitchFamily="34" charset="-120"/>
               </a:rPr>
               <a:t>PORTFOLIO № 02   /   06 OF 10</a:t>
             </a:r>
@@ -7063,7 +7077,7 @@
             <a:r>
               <a:rPr lang="en-US" sz="3600" b="1" spc="-100" kern="0" dirty="0">
                 <a:solidFill>
-                  <a:srgbClr val="1A1A17"/>
+                  <a:srgbClr val="17171A"/>
                 </a:solidFill>
                 <a:latin typeface="Georgia" pitchFamily="34" charset="0"/>
                 <a:ea typeface="Georgia" pitchFamily="34" charset="-122"/>
@@ -7077,7 +7091,7 @@
             <a:r>
               <a:rPr lang="en-US" sz="3600" b="1" i="1" spc="-100" kern="0" dirty="0">
                 <a:solidFill>
-                  <a:srgbClr val="A0032A"/>
+                  <a:srgbClr val="1E3A5F"/>
                 </a:solidFill>
                 <a:latin typeface="Georgia" pitchFamily="34" charset="0"/>
                 <a:ea typeface="Georgia" pitchFamily="34" charset="-122"/>
@@ -7116,11 +7130,11 @@
             <a:r>
               <a:rPr lang="en-US" sz="1000" spc="1000" kern="0" dirty="0">
                 <a:solidFill>
-                  <a:srgbClr val="A0032A"/>
-                </a:solidFill>
-                <a:latin typeface="Consolas" pitchFamily="34" charset="0"/>
-                <a:ea typeface="Consolas" pitchFamily="34" charset="-122"/>
-                <a:cs typeface="Consolas" pitchFamily="34" charset="-120"/>
+                  <a:srgbClr val="1E3A5F"/>
+                </a:solidFill>
+                <a:latin typeface="Calibri" pitchFamily="34" charset="0"/>
+                <a:ea typeface="Calibri" pitchFamily="34" charset="-122"/>
+                <a:cs typeface="Calibri" pitchFamily="34" charset="-120"/>
               </a:rPr>
               <a:t>ENTERPRISE &amp; ADTRAV BOOKINGS  ·  BUDGET &amp; POLICY FRAMEWORK  ·  BUILT BY T. McCOY</a:t>
             </a:r>
@@ -7171,7 +7185,7 @@
             <a:r>
               <a:rPr lang="en-US" sz="4800" b="1" i="1" spc="-200" kern="0" dirty="0">
                 <a:solidFill>
-                  <a:srgbClr val="A0032A"/>
+                  <a:srgbClr val="1E3A5F"/>
                 </a:solidFill>
                 <a:latin typeface="Georgia" pitchFamily="34" charset="0"/>
                 <a:ea typeface="Georgia" pitchFamily="34" charset="-122"/>
@@ -7210,11 +7224,11 @@
             <a:r>
               <a:rPr lang="en-US" sz="1000" spc="800" kern="0" dirty="0">
                 <a:solidFill>
-                  <a:srgbClr val="1A1A17"/>
-                </a:solidFill>
-                <a:latin typeface="Consolas" pitchFamily="34" charset="0"/>
-                <a:ea typeface="Consolas" pitchFamily="34" charset="-122"/>
-                <a:cs typeface="Consolas" pitchFamily="34" charset="-120"/>
+                  <a:srgbClr val="17171A"/>
+                </a:solidFill>
+                <a:latin typeface="Calibri" pitchFamily="34" charset="0"/>
+                <a:ea typeface="Calibri" pitchFamily="34" charset="-122"/>
+                <a:cs typeface="Calibri" pitchFamily="34" charset="-120"/>
               </a:rPr>
               <a:t>UNDER BUDGET</a:t>
             </a:r>
@@ -7237,11 +7251,11 @@
             <a:avLst/>
           </a:prstGeom>
           <a:solidFill>
-            <a:srgbClr val="F4ECDF"/>
+            <a:srgbClr val="EDE8DE"/>
           </a:solidFill>
           <a:ln w="6350">
             <a:solidFill>
-              <a:srgbClr val="1A1A17"/>
+              <a:srgbClr val="17171A"/>
             </a:solidFill>
             <a:prstDash val="solid"/>
           </a:ln>
@@ -7274,7 +7288,7 @@
             <a:r>
               <a:rPr lang="en-US" sz="4400" b="1" spc="-200" kern="0" dirty="0">
                 <a:solidFill>
-                  <a:srgbClr val="A0032A"/>
+                  <a:srgbClr val="1E3A5F"/>
                 </a:solidFill>
                 <a:latin typeface="Georgia" pitchFamily="34" charset="0"/>
                 <a:ea typeface="Georgia" pitchFamily="34" charset="-122"/>
@@ -7313,11 +7327,11 @@
             <a:r>
               <a:rPr lang="en-US" sz="900" b="1" spc="600" kern="0" dirty="0">
                 <a:solidFill>
-                  <a:srgbClr val="1A1A17"/>
-                </a:solidFill>
-                <a:latin typeface="Consolas" pitchFamily="34" charset="0"/>
-                <a:ea typeface="Consolas" pitchFamily="34" charset="-122"/>
-                <a:cs typeface="Consolas" pitchFamily="34" charset="-120"/>
+                  <a:srgbClr val="17171A"/>
+                </a:solidFill>
+                <a:latin typeface="Calibri" pitchFamily="34" charset="0"/>
+                <a:ea typeface="Calibri" pitchFamily="34" charset="-122"/>
+                <a:cs typeface="Calibri" pitchFamily="34" charset="-120"/>
               </a:rPr>
               <a:t>TRIP LINE ITEMS</a:t>
             </a:r>
@@ -7352,7 +7366,7 @@
             <a:r>
               <a:rPr lang="en-US" sz="950" dirty="0">
                 <a:solidFill>
-                  <a:srgbClr val="2C2C29"/>
+                  <a:srgbClr val="2A2A2D"/>
                 </a:solidFill>
                 <a:latin typeface="Calibri" pitchFamily="34" charset="0"/>
                 <a:ea typeface="Calibri" pitchFamily="34" charset="-122"/>
@@ -7379,11 +7393,11 @@
             <a:avLst/>
           </a:prstGeom>
           <a:solidFill>
-            <a:srgbClr val="F4ECDF"/>
+            <a:srgbClr val="EDE8DE"/>
           </a:solidFill>
           <a:ln w="6350">
             <a:solidFill>
-              <a:srgbClr val="1A1A17"/>
+              <a:srgbClr val="17171A"/>
             </a:solidFill>
             <a:prstDash val="solid"/>
           </a:ln>
@@ -7416,7 +7430,7 @@
             <a:r>
               <a:rPr lang="en-US" sz="4400" b="1" spc="-200" kern="0" dirty="0">
                 <a:solidFill>
-                  <a:srgbClr val="A0032A"/>
+                  <a:srgbClr val="1E3A5F"/>
                 </a:solidFill>
                 <a:latin typeface="Georgia" pitchFamily="34" charset="0"/>
                 <a:ea typeface="Georgia" pitchFamily="34" charset="-122"/>
@@ -7455,11 +7469,11 @@
             <a:r>
               <a:rPr lang="en-US" sz="900" b="1" spc="600" kern="0" dirty="0">
                 <a:solidFill>
-                  <a:srgbClr val="1A1A17"/>
-                </a:solidFill>
-                <a:latin typeface="Consolas" pitchFamily="34" charset="0"/>
-                <a:ea typeface="Consolas" pitchFamily="34" charset="-122"/>
-                <a:cs typeface="Consolas" pitchFamily="34" charset="-120"/>
+                  <a:srgbClr val="17171A"/>
+                </a:solidFill>
+                <a:latin typeface="Calibri" pitchFamily="34" charset="0"/>
+                <a:ea typeface="Calibri" pitchFamily="34" charset="-122"/>
+                <a:cs typeface="Calibri" pitchFamily="34" charset="-120"/>
               </a:rPr>
               <a:t>UNDER BUDGET</a:t>
             </a:r>
@@ -7494,7 +7508,7 @@
             <a:r>
               <a:rPr lang="en-US" sz="950" dirty="0">
                 <a:solidFill>
-                  <a:srgbClr val="2C2C29"/>
+                  <a:srgbClr val="2A2A2D"/>
                 </a:solidFill>
                 <a:latin typeface="Calibri" pitchFamily="34" charset="0"/>
                 <a:ea typeface="Calibri" pitchFamily="34" charset="-122"/>
@@ -7521,11 +7535,11 @@
             <a:avLst/>
           </a:prstGeom>
           <a:solidFill>
-            <a:srgbClr val="F4ECDF"/>
+            <a:srgbClr val="EDE8DE"/>
           </a:solidFill>
           <a:ln w="6350">
             <a:solidFill>
-              <a:srgbClr val="1A1A17"/>
+              <a:srgbClr val="17171A"/>
             </a:solidFill>
             <a:prstDash val="solid"/>
           </a:ln>
@@ -7558,7 +7572,7 @@
             <a:r>
               <a:rPr lang="en-US" sz="4400" b="1" spc="-200" kern="0" dirty="0">
                 <a:solidFill>
-                  <a:srgbClr val="A0032A"/>
+                  <a:srgbClr val="1E3A5F"/>
                 </a:solidFill>
                 <a:latin typeface="Georgia" pitchFamily="34" charset="0"/>
                 <a:ea typeface="Georgia" pitchFamily="34" charset="-122"/>
@@ -7597,11 +7611,11 @@
             <a:r>
               <a:rPr lang="en-US" sz="900" b="1" spc="600" kern="0" dirty="0">
                 <a:solidFill>
-                  <a:srgbClr val="1A1A17"/>
-                </a:solidFill>
-                <a:latin typeface="Consolas" pitchFamily="34" charset="0"/>
-                <a:ea typeface="Consolas" pitchFamily="34" charset="-122"/>
-                <a:cs typeface="Consolas" pitchFamily="34" charset="-120"/>
+                  <a:srgbClr val="17171A"/>
+                </a:solidFill>
+                <a:latin typeface="Calibri" pitchFamily="34" charset="0"/>
+                <a:ea typeface="Calibri" pitchFamily="34" charset="-122"/>
+                <a:cs typeface="Calibri" pitchFamily="34" charset="-120"/>
               </a:rPr>
               <a:t>POLICY COMPLIANT</a:t>
             </a:r>
@@ -7636,7 +7650,7 @@
             <a:r>
               <a:rPr lang="en-US" sz="950" dirty="0">
                 <a:solidFill>
-                  <a:srgbClr val="2C2C29"/>
+                  <a:srgbClr val="2A2A2D"/>
                 </a:solidFill>
                 <a:latin typeface="Calibri" pitchFamily="34" charset="0"/>
                 <a:ea typeface="Calibri" pitchFamily="34" charset="-122"/>
@@ -7663,11 +7677,11 @@
             <a:avLst/>
           </a:prstGeom>
           <a:solidFill>
-            <a:srgbClr val="F4ECDF"/>
+            <a:srgbClr val="EDE8DE"/>
           </a:solidFill>
           <a:ln w="6350">
             <a:solidFill>
-              <a:srgbClr val="1A1A17"/>
+              <a:srgbClr val="17171A"/>
             </a:solidFill>
             <a:prstDash val="solid"/>
           </a:ln>
@@ -7700,7 +7714,7 @@
             <a:r>
               <a:rPr lang="en-US" sz="4400" b="1" spc="-200" kern="0" dirty="0">
                 <a:solidFill>
-                  <a:srgbClr val="A0032A"/>
+                  <a:srgbClr val="1E3A5F"/>
                 </a:solidFill>
                 <a:latin typeface="Georgia" pitchFamily="34" charset="0"/>
                 <a:ea typeface="Georgia" pitchFamily="34" charset="-122"/>
@@ -7739,11 +7753,11 @@
             <a:r>
               <a:rPr lang="en-US" sz="900" b="1" spc="600" kern="0" dirty="0">
                 <a:solidFill>
-                  <a:srgbClr val="1A1A17"/>
-                </a:solidFill>
-                <a:latin typeface="Consolas" pitchFamily="34" charset="0"/>
-                <a:ea typeface="Consolas" pitchFamily="34" charset="-122"/>
-                <a:cs typeface="Consolas" pitchFamily="34" charset="-120"/>
+                  <a:srgbClr val="17171A"/>
+                </a:solidFill>
+                <a:latin typeface="Calibri" pitchFamily="34" charset="0"/>
+                <a:ea typeface="Calibri" pitchFamily="34" charset="-122"/>
+                <a:cs typeface="Calibri" pitchFamily="34" charset="-120"/>
               </a:rPr>
               <a:t>AUDIT FINDINGS</a:t>
             </a:r>
@@ -7778,7 +7792,7 @@
             <a:r>
               <a:rPr lang="en-US" sz="950" dirty="0">
                 <a:solidFill>
-                  <a:srgbClr val="2C2C29"/>
+                  <a:srgbClr val="2A2A2D"/>
                 </a:solidFill>
                 <a:latin typeface="Calibri" pitchFamily="34" charset="0"/>
                 <a:ea typeface="Calibri" pitchFamily="34" charset="-122"/>
@@ -7804,7 +7818,7 @@
     <p:bg>
       <p:bgPr>
         <a:solidFill>
-          <a:srgbClr val="FFF1E5"/>
+          <a:srgbClr val="F7F4EF"/>
         </a:solidFill>
       </p:bgPr>
     </p:bg>
@@ -7837,7 +7851,7 @@
             <a:avLst/>
           </a:prstGeom>
           <a:solidFill>
-            <a:srgbClr val="1A1A17"/>
+            <a:srgbClr val="17171A"/>
           </a:solidFill>
           <a:ln/>
         </p:spPr>
@@ -7869,11 +7883,11 @@
             <a:r>
               <a:rPr lang="en-US" sz="900" b="1" spc="400" kern="0" dirty="0">
                 <a:solidFill>
-                  <a:srgbClr val="A0032A"/>
-                </a:solidFill>
-                <a:latin typeface="Consolas" pitchFamily="34" charset="0"/>
-                <a:ea typeface="Consolas" pitchFamily="34" charset="-122"/>
-                <a:cs typeface="Consolas" pitchFamily="34" charset="-120"/>
+                  <a:srgbClr val="1E3A5F"/>
+                </a:solidFill>
+                <a:latin typeface="Calibri" pitchFamily="34" charset="0"/>
+                <a:ea typeface="Calibri" pitchFamily="34" charset="-122"/>
+                <a:cs typeface="Calibri" pitchFamily="34" charset="-120"/>
               </a:rPr>
               <a:t>§ 07   </a:t>
             </a:r>
@@ -7883,11 +7897,11 @@
             <a:r>
               <a:rPr lang="en-US" sz="900" spc="400" kern="0" dirty="0">
                 <a:solidFill>
-                  <a:srgbClr val="1A1A17"/>
-                </a:solidFill>
-                <a:latin typeface="Consolas" pitchFamily="34" charset="0"/>
-                <a:ea typeface="Consolas" pitchFamily="34" charset="-122"/>
-                <a:cs typeface="Consolas" pitchFamily="34" charset="-120"/>
+                  <a:srgbClr val="17171A"/>
+                </a:solidFill>
+                <a:latin typeface="Calibri" pitchFamily="34" charset="0"/>
+                <a:ea typeface="Calibri" pitchFamily="34" charset="-122"/>
+                <a:cs typeface="Calibri" pitchFamily="34" charset="-120"/>
               </a:rPr>
               <a:t>SYSTEMS &amp; TOOLS</a:t>
             </a:r>
@@ -7922,11 +7936,11 @@
             <a:r>
               <a:rPr lang="en-US" sz="900" spc="400" kern="0" dirty="0">
                 <a:solidFill>
-                  <a:srgbClr val="6B665E"/>
-                </a:solidFill>
-                <a:latin typeface="Consolas" pitchFamily="34" charset="0"/>
-                <a:ea typeface="Consolas" pitchFamily="34" charset="-122"/>
-                <a:cs typeface="Consolas" pitchFamily="34" charset="-120"/>
+                  <a:srgbClr val="6E6B66"/>
+                </a:solidFill>
+                <a:latin typeface="Calibri" pitchFamily="34" charset="0"/>
+                <a:ea typeface="Calibri" pitchFamily="34" charset="-122"/>
+                <a:cs typeface="Calibri" pitchFamily="34" charset="-120"/>
               </a:rPr>
               <a:t>THOMAS MCCOY — THE LEDGER, VOL. I</a:t>
             </a:r>
@@ -7949,7 +7963,7 @@
             <a:avLst/>
           </a:prstGeom>
           <a:solidFill>
-            <a:srgbClr val="1A1A17"/>
+            <a:srgbClr val="17171A"/>
           </a:solidFill>
           <a:ln/>
         </p:spPr>
@@ -7981,11 +7995,11 @@
             <a:r>
               <a:rPr lang="en-US" sz="800" dirty="0">
                 <a:solidFill>
-                  <a:srgbClr val="6B665E"/>
-                </a:solidFill>
-                <a:latin typeface="Consolas" pitchFamily="34" charset="0"/>
-                <a:ea typeface="Consolas" pitchFamily="34" charset="-122"/>
-                <a:cs typeface="Consolas" pitchFamily="34" charset="-120"/>
+                  <a:srgbClr val="6E6B66"/>
+                </a:solidFill>
+                <a:latin typeface="Calibri" pitchFamily="34" charset="0"/>
+                <a:ea typeface="Calibri" pitchFamily="34" charset="-122"/>
+                <a:cs typeface="Calibri" pitchFamily="34" charset="-120"/>
               </a:rPr>
               <a:t>tpmccoy2020@gmail.com  ·  480.828.1125  ·  Gilbert, AZ</a:t>
             </a:r>
@@ -8020,11 +8034,11 @@
             <a:r>
               <a:rPr lang="en-US" sz="800" spc="400" kern="0" dirty="0">
                 <a:solidFill>
-                  <a:srgbClr val="6B665E"/>
-                </a:solidFill>
-                <a:latin typeface="Consolas" pitchFamily="34" charset="0"/>
-                <a:ea typeface="Consolas" pitchFamily="34" charset="-122"/>
-                <a:cs typeface="Consolas" pitchFamily="34" charset="-120"/>
+                  <a:srgbClr val="6E6B66"/>
+                </a:solidFill>
+                <a:latin typeface="Calibri" pitchFamily="34" charset="0"/>
+                <a:ea typeface="Calibri" pitchFamily="34" charset="-122"/>
+                <a:cs typeface="Calibri" pitchFamily="34" charset="-120"/>
               </a:rPr>
               <a:t>PORTFOLIO № 02   /   07 OF 10</a:t>
             </a:r>
@@ -8059,7 +8073,7 @@
             <a:r>
               <a:rPr lang="en-US" sz="3800" b="1" spc="-100" kern="0" dirty="0">
                 <a:solidFill>
-                  <a:srgbClr val="1A1A17"/>
+                  <a:srgbClr val="17171A"/>
                 </a:solidFill>
                 <a:latin typeface="Georgia" pitchFamily="34" charset="0"/>
                 <a:ea typeface="Georgia" pitchFamily="34" charset="-122"/>
@@ -8073,7 +8087,7 @@
             <a:r>
               <a:rPr lang="en-US" sz="3800" b="1" i="1" spc="-100" kern="0" dirty="0">
                 <a:solidFill>
-                  <a:srgbClr val="A0032A"/>
+                  <a:srgbClr val="1E3A5F"/>
                 </a:solidFill>
                 <a:latin typeface="Georgia" pitchFamily="34" charset="0"/>
                 <a:ea typeface="Georgia" pitchFamily="34" charset="-122"/>
@@ -8112,11 +8126,11 @@
             <a:r>
               <a:rPr lang="en-US" sz="1000" spc="1000" kern="0" dirty="0">
                 <a:solidFill>
-                  <a:srgbClr val="A0032A"/>
-                </a:solidFill>
-                <a:latin typeface="Consolas" pitchFamily="34" charset="0"/>
-                <a:ea typeface="Consolas" pitchFamily="34" charset="-122"/>
-                <a:cs typeface="Consolas" pitchFamily="34" charset="-120"/>
+                  <a:srgbClr val="1E3A5F"/>
+                </a:solidFill>
+                <a:latin typeface="Calibri" pitchFamily="34" charset="0"/>
+                <a:ea typeface="Calibri" pitchFamily="34" charset="-122"/>
+                <a:cs typeface="Calibri" pitchFamily="34" charset="-120"/>
               </a:rPr>
               <a:t>ERP  ·  ANALYTICS  ·  AUTOMATION  ·  REGULATORY FRAMEWORKS</a:t>
             </a:r>
@@ -8139,11 +8153,11 @@
             <a:avLst/>
           </a:prstGeom>
           <a:solidFill>
-            <a:srgbClr val="F4ECDF"/>
+            <a:srgbClr val="EDE8DE"/>
           </a:solidFill>
           <a:ln w="9525">
             <a:solidFill>
-              <a:srgbClr val="1A1A17"/>
+              <a:srgbClr val="17171A"/>
             </a:solidFill>
             <a:prstDash val="solid"/>
           </a:ln>
@@ -8164,7 +8178,7 @@
             <a:avLst/>
           </a:prstGeom>
           <a:solidFill>
-            <a:srgbClr val="A0032A"/>
+            <a:srgbClr val="1E3A5F"/>
           </a:solidFill>
           <a:ln/>
         </p:spPr>
@@ -8196,7 +8210,7 @@
             <a:r>
               <a:rPr lang="en-US" sz="1800" b="1" dirty="0">
                 <a:solidFill>
-                  <a:srgbClr val="FFF1E5"/>
+                  <a:srgbClr val="F7F4EF"/>
                 </a:solidFill>
                 <a:latin typeface="Georgia" pitchFamily="34" charset="0"/>
                 <a:ea typeface="Georgia" pitchFamily="34" charset="-122"/>
@@ -8235,7 +8249,7 @@
             <a:r>
               <a:rPr lang="en-US" sz="2200" b="1" spc="-100" kern="0" dirty="0">
                 <a:solidFill>
-                  <a:srgbClr val="1A1A17"/>
+                  <a:srgbClr val="17171A"/>
                 </a:solidFill>
                 <a:latin typeface="Georgia" pitchFamily="34" charset="0"/>
                 <a:ea typeface="Georgia" pitchFamily="34" charset="-122"/>
@@ -8274,11 +8288,11 @@
             <a:r>
               <a:rPr lang="en-US" sz="900" b="1" spc="600" kern="0" dirty="0">
                 <a:solidFill>
-                  <a:srgbClr val="A0032A"/>
-                </a:solidFill>
-                <a:latin typeface="Consolas" pitchFamily="34" charset="0"/>
-                <a:ea typeface="Consolas" pitchFamily="34" charset="-122"/>
-                <a:cs typeface="Consolas" pitchFamily="34" charset="-120"/>
+                  <a:srgbClr val="1E3A5F"/>
+                </a:solidFill>
+                <a:latin typeface="Calibri" pitchFamily="34" charset="0"/>
+                <a:ea typeface="Calibri" pitchFamily="34" charset="-122"/>
+                <a:cs typeface="Calibri" pitchFamily="34" charset="-120"/>
               </a:rPr>
               <a:t>EXPERT</a:t>
             </a:r>
@@ -8313,7 +8327,7 @@
             <a:r>
               <a:rPr lang="en-US" sz="1050" dirty="0">
                 <a:solidFill>
-                  <a:srgbClr val="2C2C29"/>
+                  <a:srgbClr val="2A2A2D"/>
                 </a:solidFill>
                 <a:latin typeface="Calibri" pitchFamily="34" charset="0"/>
                 <a:ea typeface="Calibri" pitchFamily="34" charset="-122"/>
@@ -8340,11 +8354,11 @@
             <a:avLst/>
           </a:prstGeom>
           <a:solidFill>
-            <a:srgbClr val="F4ECDF"/>
+            <a:srgbClr val="EDE8DE"/>
           </a:solidFill>
           <a:ln w="9525">
             <a:solidFill>
-              <a:srgbClr val="1A1A17"/>
+              <a:srgbClr val="17171A"/>
             </a:solidFill>
             <a:prstDash val="solid"/>
           </a:ln>
@@ -8365,7 +8379,7 @@
             <a:avLst/>
           </a:prstGeom>
           <a:solidFill>
-            <a:srgbClr val="A0032A"/>
+            <a:srgbClr val="1E3A5F"/>
           </a:solidFill>
           <a:ln/>
         </p:spPr>
@@ -8397,7 +8411,7 @@
             <a:r>
               <a:rPr lang="en-US" sz="1800" b="1" dirty="0">
                 <a:solidFill>
-                  <a:srgbClr val="FFF1E5"/>
+                  <a:srgbClr val="F7F4EF"/>
                 </a:solidFill>
                 <a:latin typeface="Georgia" pitchFamily="34" charset="0"/>
                 <a:ea typeface="Georgia" pitchFamily="34" charset="-122"/>
@@ -8436,7 +8450,7 @@
             <a:r>
               <a:rPr lang="en-US" sz="2200" b="1" spc="-100" kern="0" dirty="0">
                 <a:solidFill>
-                  <a:srgbClr val="1A1A17"/>
+                  <a:srgbClr val="17171A"/>
                 </a:solidFill>
                 <a:latin typeface="Georgia" pitchFamily="34" charset="0"/>
                 <a:ea typeface="Georgia" pitchFamily="34" charset="-122"/>
@@ -8475,11 +8489,11 @@
             <a:r>
               <a:rPr lang="en-US" sz="900" b="1" spc="600" kern="0" dirty="0">
                 <a:solidFill>
-                  <a:srgbClr val="A0032A"/>
-                </a:solidFill>
-                <a:latin typeface="Consolas" pitchFamily="34" charset="0"/>
-                <a:ea typeface="Consolas" pitchFamily="34" charset="-122"/>
-                <a:cs typeface="Consolas" pitchFamily="34" charset="-120"/>
+                  <a:srgbClr val="1E3A5F"/>
+                </a:solidFill>
+                <a:latin typeface="Calibri" pitchFamily="34" charset="0"/>
+                <a:ea typeface="Calibri" pitchFamily="34" charset="-122"/>
+                <a:cs typeface="Calibri" pitchFamily="34" charset="-120"/>
               </a:rPr>
               <a:t>PROFICIENT</a:t>
             </a:r>
@@ -8514,7 +8528,7 @@
             <a:r>
               <a:rPr lang="en-US" sz="1050" dirty="0">
                 <a:solidFill>
-                  <a:srgbClr val="2C2C29"/>
+                  <a:srgbClr val="2A2A2D"/>
                 </a:solidFill>
                 <a:latin typeface="Calibri" pitchFamily="34" charset="0"/>
                 <a:ea typeface="Calibri" pitchFamily="34" charset="-122"/>
@@ -8541,11 +8555,11 @@
             <a:avLst/>
           </a:prstGeom>
           <a:solidFill>
-            <a:srgbClr val="F4ECDF"/>
+            <a:srgbClr val="EDE8DE"/>
           </a:solidFill>
           <a:ln w="9525">
             <a:solidFill>
-              <a:srgbClr val="1A1A17"/>
+              <a:srgbClr val="17171A"/>
             </a:solidFill>
             <a:prstDash val="solid"/>
           </a:ln>
@@ -8566,7 +8580,7 @@
             <a:avLst/>
           </a:prstGeom>
           <a:solidFill>
-            <a:srgbClr val="A0032A"/>
+            <a:srgbClr val="1E3A5F"/>
           </a:solidFill>
           <a:ln/>
         </p:spPr>
@@ -8598,7 +8612,7 @@
             <a:r>
               <a:rPr lang="en-US" sz="1800" b="1" dirty="0">
                 <a:solidFill>
-                  <a:srgbClr val="FFF1E5"/>
+                  <a:srgbClr val="F7F4EF"/>
                 </a:solidFill>
                 <a:latin typeface="Georgia" pitchFamily="34" charset="0"/>
                 <a:ea typeface="Georgia" pitchFamily="34" charset="-122"/>
@@ -8637,7 +8651,7 @@
             <a:r>
               <a:rPr lang="en-US" sz="2200" b="1" spc="-100" kern="0" dirty="0">
                 <a:solidFill>
-                  <a:srgbClr val="1A1A17"/>
+                  <a:srgbClr val="17171A"/>
                 </a:solidFill>
                 <a:latin typeface="Georgia" pitchFamily="34" charset="0"/>
                 <a:ea typeface="Georgia" pitchFamily="34" charset="-122"/>
@@ -8676,11 +8690,11 @@
             <a:r>
               <a:rPr lang="en-US" sz="900" b="1" spc="600" kern="0" dirty="0">
                 <a:solidFill>
-                  <a:srgbClr val="A0032A"/>
-                </a:solidFill>
-                <a:latin typeface="Consolas" pitchFamily="34" charset="0"/>
-                <a:ea typeface="Consolas" pitchFamily="34" charset="-122"/>
-                <a:cs typeface="Consolas" pitchFamily="34" charset="-120"/>
+                  <a:srgbClr val="1E3A5F"/>
+                </a:solidFill>
+                <a:latin typeface="Calibri" pitchFamily="34" charset="0"/>
+                <a:ea typeface="Calibri" pitchFamily="34" charset="-122"/>
+                <a:cs typeface="Calibri" pitchFamily="34" charset="-120"/>
               </a:rPr>
               <a:t>PROFICIENT</a:t>
             </a:r>
@@ -8715,7 +8729,7 @@
             <a:r>
               <a:rPr lang="en-US" sz="1050" dirty="0">
                 <a:solidFill>
-                  <a:srgbClr val="2C2C29"/>
+                  <a:srgbClr val="2A2A2D"/>
                 </a:solidFill>
                 <a:latin typeface="Calibri" pitchFamily="34" charset="0"/>
                 <a:ea typeface="Calibri" pitchFamily="34" charset="-122"/>
@@ -8742,11 +8756,11 @@
             <a:avLst/>
           </a:prstGeom>
           <a:solidFill>
-            <a:srgbClr val="F4ECDF"/>
+            <a:srgbClr val="EDE8DE"/>
           </a:solidFill>
           <a:ln w="9525">
             <a:solidFill>
-              <a:srgbClr val="1A1A17"/>
+              <a:srgbClr val="17171A"/>
             </a:solidFill>
             <a:prstDash val="solid"/>
           </a:ln>
@@ -8767,7 +8781,7 @@
             <a:avLst/>
           </a:prstGeom>
           <a:solidFill>
-            <a:srgbClr val="A0032A"/>
+            <a:srgbClr val="1E3A5F"/>
           </a:solidFill>
           <a:ln/>
         </p:spPr>
@@ -8799,7 +8813,7 @@
             <a:r>
               <a:rPr lang="en-US" sz="1800" b="1" dirty="0">
                 <a:solidFill>
-                  <a:srgbClr val="FFF1E5"/>
+                  <a:srgbClr val="F7F4EF"/>
                 </a:solidFill>
                 <a:latin typeface="Georgia" pitchFamily="34" charset="0"/>
                 <a:ea typeface="Georgia" pitchFamily="34" charset="-122"/>
@@ -8838,7 +8852,7 @@
             <a:r>
               <a:rPr lang="en-US" sz="2200" b="1" spc="-100" kern="0" dirty="0">
                 <a:solidFill>
-                  <a:srgbClr val="1A1A17"/>
+                  <a:srgbClr val="17171A"/>
                 </a:solidFill>
                 <a:latin typeface="Georgia" pitchFamily="34" charset="0"/>
                 <a:ea typeface="Georgia" pitchFamily="34" charset="-122"/>
@@ -8877,11 +8891,11 @@
             <a:r>
               <a:rPr lang="en-US" sz="900" b="1" spc="600" kern="0" dirty="0">
                 <a:solidFill>
-                  <a:srgbClr val="A0032A"/>
-                </a:solidFill>
-                <a:latin typeface="Consolas" pitchFamily="34" charset="0"/>
-                <a:ea typeface="Consolas" pitchFamily="34" charset="-122"/>
-                <a:cs typeface="Consolas" pitchFamily="34" charset="-120"/>
+                  <a:srgbClr val="1E3A5F"/>
+                </a:solidFill>
+                <a:latin typeface="Calibri" pitchFamily="34" charset="0"/>
+                <a:ea typeface="Calibri" pitchFamily="34" charset="-122"/>
+                <a:cs typeface="Calibri" pitchFamily="34" charset="-120"/>
               </a:rPr>
               <a:t>PROFICIENT</a:t>
             </a:r>
@@ -8916,7 +8930,7 @@
             <a:r>
               <a:rPr lang="en-US" sz="1050" dirty="0">
                 <a:solidFill>
-                  <a:srgbClr val="2C2C29"/>
+                  <a:srgbClr val="2A2A2D"/>
                 </a:solidFill>
                 <a:latin typeface="Calibri" pitchFamily="34" charset="0"/>
                 <a:ea typeface="Calibri" pitchFamily="34" charset="-122"/>
@@ -8943,11 +8957,11 @@
             <a:avLst/>
           </a:prstGeom>
           <a:solidFill>
-            <a:srgbClr val="F4ECDF"/>
+            <a:srgbClr val="EDE8DE"/>
           </a:solidFill>
           <a:ln w="9525">
             <a:solidFill>
-              <a:srgbClr val="1A1A17"/>
+              <a:srgbClr val="17171A"/>
             </a:solidFill>
             <a:prstDash val="solid"/>
           </a:ln>
@@ -8968,7 +8982,7 @@
             <a:avLst/>
           </a:prstGeom>
           <a:solidFill>
-            <a:srgbClr val="A0032A"/>
+            <a:srgbClr val="1E3A5F"/>
           </a:solidFill>
           <a:ln/>
         </p:spPr>
@@ -9000,7 +9014,7 @@
             <a:r>
               <a:rPr lang="en-US" sz="1800" b="1" dirty="0">
                 <a:solidFill>
-                  <a:srgbClr val="FFF1E5"/>
+                  <a:srgbClr val="F7F4EF"/>
                 </a:solidFill>
                 <a:latin typeface="Georgia" pitchFamily="34" charset="0"/>
                 <a:ea typeface="Georgia" pitchFamily="34" charset="-122"/>
@@ -9039,7 +9053,7 @@
             <a:r>
               <a:rPr lang="en-US" sz="2200" b="1" spc="-100" kern="0" dirty="0">
                 <a:solidFill>
-                  <a:srgbClr val="1A1A17"/>
+                  <a:srgbClr val="17171A"/>
                 </a:solidFill>
                 <a:latin typeface="Georgia" pitchFamily="34" charset="0"/>
                 <a:ea typeface="Georgia" pitchFamily="34" charset="-122"/>
@@ -9078,11 +9092,11 @@
             <a:r>
               <a:rPr lang="en-US" sz="900" b="1" spc="600" kern="0" dirty="0">
                 <a:solidFill>
-                  <a:srgbClr val="A0032A"/>
-                </a:solidFill>
-                <a:latin typeface="Consolas" pitchFamily="34" charset="0"/>
-                <a:ea typeface="Consolas" pitchFamily="34" charset="-122"/>
-                <a:cs typeface="Consolas" pitchFamily="34" charset="-120"/>
+                  <a:srgbClr val="1E3A5F"/>
+                </a:solidFill>
+                <a:latin typeface="Calibri" pitchFamily="34" charset="0"/>
+                <a:ea typeface="Calibri" pitchFamily="34" charset="-122"/>
+                <a:cs typeface="Calibri" pitchFamily="34" charset="-120"/>
               </a:rPr>
               <a:t>EXPERT</a:t>
             </a:r>
@@ -9117,7 +9131,7 @@
             <a:r>
               <a:rPr lang="en-US" sz="1050" dirty="0">
                 <a:solidFill>
-                  <a:srgbClr val="2C2C29"/>
+                  <a:srgbClr val="2A2A2D"/>
                 </a:solidFill>
                 <a:latin typeface="Calibri" pitchFamily="34" charset="0"/>
                 <a:ea typeface="Calibri" pitchFamily="34" charset="-122"/>
@@ -9144,11 +9158,11 @@
             <a:avLst/>
           </a:prstGeom>
           <a:solidFill>
-            <a:srgbClr val="F4ECDF"/>
+            <a:srgbClr val="EDE8DE"/>
           </a:solidFill>
           <a:ln w="9525">
             <a:solidFill>
-              <a:srgbClr val="1A1A17"/>
+              <a:srgbClr val="17171A"/>
             </a:solidFill>
             <a:prstDash val="solid"/>
           </a:ln>
@@ -9169,7 +9183,7 @@
             <a:avLst/>
           </a:prstGeom>
           <a:solidFill>
-            <a:srgbClr val="A0032A"/>
+            <a:srgbClr val="1E3A5F"/>
           </a:solidFill>
           <a:ln/>
         </p:spPr>
@@ -9201,7 +9215,7 @@
             <a:r>
               <a:rPr lang="en-US" sz="1800" b="1" dirty="0">
                 <a:solidFill>
-                  <a:srgbClr val="FFF1E5"/>
+                  <a:srgbClr val="F7F4EF"/>
                 </a:solidFill>
                 <a:latin typeface="Georgia" pitchFamily="34" charset="0"/>
                 <a:ea typeface="Georgia" pitchFamily="34" charset="-122"/>
@@ -9240,7 +9254,7 @@
             <a:r>
               <a:rPr lang="en-US" sz="2200" b="1" spc="-100" kern="0" dirty="0">
                 <a:solidFill>
-                  <a:srgbClr val="1A1A17"/>
+                  <a:srgbClr val="17171A"/>
                 </a:solidFill>
                 <a:latin typeface="Georgia" pitchFamily="34" charset="0"/>
                 <a:ea typeface="Georgia" pitchFamily="34" charset="-122"/>
@@ -9279,11 +9293,11 @@
             <a:r>
               <a:rPr lang="en-US" sz="900" b="1" spc="600" kern="0" dirty="0">
                 <a:solidFill>
-                  <a:srgbClr val="A0032A"/>
-                </a:solidFill>
-                <a:latin typeface="Consolas" pitchFamily="34" charset="0"/>
-                <a:ea typeface="Consolas" pitchFamily="34" charset="-122"/>
-                <a:cs typeface="Consolas" pitchFamily="34" charset="-120"/>
+                  <a:srgbClr val="1E3A5F"/>
+                </a:solidFill>
+                <a:latin typeface="Calibri" pitchFamily="34" charset="0"/>
+                <a:ea typeface="Calibri" pitchFamily="34" charset="-122"/>
+                <a:cs typeface="Calibri" pitchFamily="34" charset="-120"/>
               </a:rPr>
               <a:t>COMPLIANCE</a:t>
             </a:r>
@@ -9318,7 +9332,7 @@
             <a:r>
               <a:rPr lang="en-US" sz="1050" dirty="0">
                 <a:solidFill>
-                  <a:srgbClr val="2C2C29"/>
+                  <a:srgbClr val="2A2A2D"/>
                 </a:solidFill>
                 <a:latin typeface="Calibri" pitchFamily="34" charset="0"/>
                 <a:ea typeface="Calibri" pitchFamily="34" charset="-122"/>
@@ -9344,7 +9358,7 @@
     <p:bg>
       <p:bgPr>
         <a:solidFill>
-          <a:srgbClr val="FFF1E5"/>
+          <a:srgbClr val="F7F4EF"/>
         </a:solidFill>
       </p:bgPr>
     </p:bg>
@@ -9377,7 +9391,7 @@
             <a:avLst/>
           </a:prstGeom>
           <a:solidFill>
-            <a:srgbClr val="1A1A17"/>
+            <a:srgbClr val="17171A"/>
           </a:solidFill>
           <a:ln/>
         </p:spPr>
@@ -9409,11 +9423,11 @@
             <a:r>
               <a:rPr lang="en-US" sz="900" b="1" spc="400" kern="0" dirty="0">
                 <a:solidFill>
-                  <a:srgbClr val="A0032A"/>
-                </a:solidFill>
-                <a:latin typeface="Consolas" pitchFamily="34" charset="0"/>
-                <a:ea typeface="Consolas" pitchFamily="34" charset="-122"/>
-                <a:cs typeface="Consolas" pitchFamily="34" charset="-120"/>
+                  <a:srgbClr val="1E3A5F"/>
+                </a:solidFill>
+                <a:latin typeface="Calibri" pitchFamily="34" charset="0"/>
+                <a:ea typeface="Calibri" pitchFamily="34" charset="-122"/>
+                <a:cs typeface="Calibri" pitchFamily="34" charset="-120"/>
               </a:rPr>
               <a:t>§ 08   </a:t>
             </a:r>
@@ -9423,11 +9437,11 @@
             <a:r>
               <a:rPr lang="en-US" sz="900" spc="400" kern="0" dirty="0">
                 <a:solidFill>
-                  <a:srgbClr val="1A1A17"/>
-                </a:solidFill>
-                <a:latin typeface="Consolas" pitchFamily="34" charset="0"/>
-                <a:ea typeface="Consolas" pitchFamily="34" charset="-122"/>
-                <a:cs typeface="Consolas" pitchFamily="34" charset="-120"/>
+                  <a:srgbClr val="17171A"/>
+                </a:solidFill>
+                <a:latin typeface="Calibri" pitchFamily="34" charset="0"/>
+                <a:ea typeface="Calibri" pitchFamily="34" charset="-122"/>
+                <a:cs typeface="Calibri" pitchFamily="34" charset="-120"/>
               </a:rPr>
               <a:t>EDUCATION &amp; CREDENTIALS</a:t>
             </a:r>
@@ -9462,11 +9476,11 @@
             <a:r>
               <a:rPr lang="en-US" sz="900" spc="400" kern="0" dirty="0">
                 <a:solidFill>
-                  <a:srgbClr val="6B665E"/>
-                </a:solidFill>
-                <a:latin typeface="Consolas" pitchFamily="34" charset="0"/>
-                <a:ea typeface="Consolas" pitchFamily="34" charset="-122"/>
-                <a:cs typeface="Consolas" pitchFamily="34" charset="-120"/>
+                  <a:srgbClr val="6E6B66"/>
+                </a:solidFill>
+                <a:latin typeface="Calibri" pitchFamily="34" charset="0"/>
+                <a:ea typeface="Calibri" pitchFamily="34" charset="-122"/>
+                <a:cs typeface="Calibri" pitchFamily="34" charset="-120"/>
               </a:rPr>
               <a:t>THOMAS MCCOY — THE LEDGER, VOL. I</a:t>
             </a:r>
@@ -9489,7 +9503,7 @@
             <a:avLst/>
           </a:prstGeom>
           <a:solidFill>
-            <a:srgbClr val="1A1A17"/>
+            <a:srgbClr val="17171A"/>
           </a:solidFill>
           <a:ln/>
         </p:spPr>
@@ -9521,11 +9535,11 @@
             <a:r>
               <a:rPr lang="en-US" sz="800" dirty="0">
                 <a:solidFill>
-                  <a:srgbClr val="6B665E"/>
-                </a:solidFill>
-                <a:latin typeface="Consolas" pitchFamily="34" charset="0"/>
-                <a:ea typeface="Consolas" pitchFamily="34" charset="-122"/>
-                <a:cs typeface="Consolas" pitchFamily="34" charset="-120"/>
+                  <a:srgbClr val="6E6B66"/>
+                </a:solidFill>
+                <a:latin typeface="Calibri" pitchFamily="34" charset="0"/>
+                <a:ea typeface="Calibri" pitchFamily="34" charset="-122"/>
+                <a:cs typeface="Calibri" pitchFamily="34" charset="-120"/>
               </a:rPr>
               <a:t>tpmccoy2020@gmail.com  ·  480.828.1125  ·  Gilbert, AZ</a:t>
             </a:r>
@@ -9560,11 +9574,11 @@
             <a:r>
               <a:rPr lang="en-US" sz="800" spc="400" kern="0" dirty="0">
                 <a:solidFill>
-                  <a:srgbClr val="6B665E"/>
-                </a:solidFill>
-                <a:latin typeface="Consolas" pitchFamily="34" charset="0"/>
-                <a:ea typeface="Consolas" pitchFamily="34" charset="-122"/>
-                <a:cs typeface="Consolas" pitchFamily="34" charset="-120"/>
+                  <a:srgbClr val="6E6B66"/>
+                </a:solidFill>
+                <a:latin typeface="Calibri" pitchFamily="34" charset="0"/>
+                <a:ea typeface="Calibri" pitchFamily="34" charset="-122"/>
+                <a:cs typeface="Calibri" pitchFamily="34" charset="-120"/>
               </a:rPr>
               <a:t>PORTFOLIO № 02   /   08 OF 10</a:t>
             </a:r>
@@ -9599,7 +9613,7 @@
             <a:r>
               <a:rPr lang="en-US" sz="3800" b="1" spc="-100" kern="0" dirty="0">
                 <a:solidFill>
-                  <a:srgbClr val="1A1A17"/>
+                  <a:srgbClr val="17171A"/>
                 </a:solidFill>
                 <a:latin typeface="Georgia" pitchFamily="34" charset="0"/>
                 <a:ea typeface="Georgia" pitchFamily="34" charset="-122"/>
@@ -9613,7 +9627,7 @@
             <a:r>
               <a:rPr lang="en-US" sz="3800" b="1" i="1" spc="-100" kern="0" dirty="0">
                 <a:solidFill>
-                  <a:srgbClr val="A0032A"/>
+                  <a:srgbClr val="1E3A5F"/>
                 </a:solidFill>
                 <a:latin typeface="Georgia" pitchFamily="34" charset="0"/>
                 <a:ea typeface="Georgia" pitchFamily="34" charset="-122"/>
@@ -9627,7 +9641,7 @@
             <a:r>
               <a:rPr lang="en-US" sz="3800" b="1" spc="-100" kern="0" dirty="0">
                 <a:solidFill>
-                  <a:srgbClr val="1A1A17"/>
+                  <a:srgbClr val="17171A"/>
                 </a:solidFill>
                 <a:latin typeface="Georgia" pitchFamily="34" charset="0"/>
                 <a:ea typeface="Georgia" pitchFamily="34" charset="-122"/>
@@ -9641,7 +9655,7 @@
             <a:r>
               <a:rPr lang="en-US" sz="3800" b="1" spc="-100" kern="0" dirty="0">
                 <a:solidFill>
-                  <a:srgbClr val="1A1A17"/>
+                  <a:srgbClr val="17171A"/>
                 </a:solidFill>
                 <a:latin typeface="Georgia" pitchFamily="34" charset="0"/>
                 <a:ea typeface="Georgia" pitchFamily="34" charset="-122"/>
@@ -9680,11 +9694,11 @@
             <a:r>
               <a:rPr lang="en-US" sz="1000" spc="1000" kern="0" dirty="0">
                 <a:solidFill>
-                  <a:srgbClr val="A0032A"/>
-                </a:solidFill>
-                <a:latin typeface="Consolas" pitchFamily="34" charset="0"/>
-                <a:ea typeface="Consolas" pitchFamily="34" charset="-122"/>
-                <a:cs typeface="Consolas" pitchFamily="34" charset="-120"/>
+                  <a:srgbClr val="1E3A5F"/>
+                </a:solidFill>
+                <a:latin typeface="Calibri" pitchFamily="34" charset="0"/>
+                <a:ea typeface="Calibri" pitchFamily="34" charset="-122"/>
+                <a:cs typeface="Calibri" pitchFamily="34" charset="-120"/>
               </a:rPr>
               <a:t>ACADEMIC BACKGROUND  ·  HONORS  ·  PROFESSIONAL CREDENTIALS</a:t>
             </a:r>
@@ -9707,7 +9721,7 @@
             <a:avLst/>
           </a:prstGeom>
           <a:solidFill>
-            <a:srgbClr val="1A1A17"/>
+            <a:srgbClr val="17171A"/>
           </a:solidFill>
           <a:ln/>
         </p:spPr>
@@ -9739,11 +9753,11 @@
             <a:r>
               <a:rPr lang="en-US" sz="900" spc="1000" kern="0" dirty="0">
                 <a:solidFill>
-                  <a:srgbClr val="C8A04A"/>
-                </a:solidFill>
-                <a:latin typeface="Consolas" pitchFamily="34" charset="0"/>
-                <a:ea typeface="Consolas" pitchFamily="34" charset="-122"/>
-                <a:cs typeface="Consolas" pitchFamily="34" charset="-120"/>
+                  <a:srgbClr val="A8C5E8"/>
+                </a:solidFill>
+                <a:latin typeface="Calibri" pitchFamily="34" charset="0"/>
+                <a:ea typeface="Calibri" pitchFamily="34" charset="-122"/>
+                <a:cs typeface="Calibri" pitchFamily="34" charset="-120"/>
               </a:rPr>
               <a:t>GRADUATE</a:t>
             </a:r>
@@ -9778,7 +9792,7 @@
             <a:r>
               <a:rPr lang="en-US" sz="3400" b="1" spc="-100" kern="0" dirty="0">
                 <a:solidFill>
-                  <a:srgbClr val="FFF1E5"/>
+                  <a:srgbClr val="F7F4EF"/>
                 </a:solidFill>
                 <a:latin typeface="Georgia" pitchFamily="34" charset="0"/>
                 <a:ea typeface="Georgia" pitchFamily="34" charset="-122"/>
@@ -9795,7 +9809,7 @@
             <a:r>
               <a:rPr lang="en-US" sz="3400" b="1" spc="-100" kern="0" dirty="0">
                 <a:solidFill>
-                  <a:srgbClr val="FFF1E5"/>
+                  <a:srgbClr val="F7F4EF"/>
                 </a:solidFill>
                 <a:latin typeface="Georgia" pitchFamily="34" charset="0"/>
                 <a:ea typeface="Georgia" pitchFamily="34" charset="-122"/>
@@ -9812,7 +9826,7 @@
             <a:r>
               <a:rPr lang="en-US" sz="3400" b="1" i="1" spc="-100" kern="0" dirty="0">
                 <a:solidFill>
-                  <a:srgbClr val="C8A04A"/>
+                  <a:srgbClr val="A8C5E8"/>
                 </a:solidFill>
                 <a:latin typeface="Georgia" pitchFamily="34" charset="0"/>
                 <a:ea typeface="Georgia" pitchFamily="34" charset="-122"/>
@@ -9839,7 +9853,7 @@
             <a:avLst/>
           </a:prstGeom>
           <a:solidFill>
-            <a:srgbClr val="C8A04A"/>
+            <a:srgbClr val="A8C5E8"/>
           </a:solidFill>
           <a:ln/>
         </p:spPr>
@@ -9871,11 +9885,11 @@
             <a:r>
               <a:rPr lang="en-US" sz="900" spc="600" kern="0" dirty="0">
                 <a:solidFill>
-                  <a:srgbClr val="FFF1E5"/>
-                </a:solidFill>
-                <a:latin typeface="Consolas" pitchFamily="34" charset="0"/>
-                <a:ea typeface="Consolas" pitchFamily="34" charset="-122"/>
-                <a:cs typeface="Consolas" pitchFamily="34" charset="-120"/>
+                  <a:srgbClr val="F7F4EF"/>
+                </a:solidFill>
+                <a:latin typeface="Calibri" pitchFamily="34" charset="0"/>
+                <a:ea typeface="Calibri" pitchFamily="34" charset="-122"/>
+                <a:cs typeface="Calibri" pitchFamily="34" charset="-120"/>
               </a:rPr>
               <a:t>GRAND CANYON UNIVERSITY  ·  PHOENIX, AZ</a:t>
             </a:r>
@@ -9898,11 +9912,11 @@
             <a:avLst/>
           </a:prstGeom>
           <a:solidFill>
-            <a:srgbClr val="F4ECDF"/>
+            <a:srgbClr val="EDE8DE"/>
           </a:solidFill>
           <a:ln w="6350">
             <a:solidFill>
-              <a:srgbClr val="1A1A17"/>
+              <a:srgbClr val="17171A"/>
             </a:solidFill>
             <a:prstDash val="solid"/>
           </a:ln>
@@ -9935,11 +9949,11 @@
             <a:r>
               <a:rPr lang="en-US" sz="900" spc="1000" kern="0" dirty="0">
                 <a:solidFill>
-                  <a:srgbClr val="A0032A"/>
-                </a:solidFill>
-                <a:latin typeface="Consolas" pitchFamily="34" charset="0"/>
-                <a:ea typeface="Consolas" pitchFamily="34" charset="-122"/>
-                <a:cs typeface="Consolas" pitchFamily="34" charset="-120"/>
+                  <a:srgbClr val="1E3A5F"/>
+                </a:solidFill>
+                <a:latin typeface="Calibri" pitchFamily="34" charset="0"/>
+                <a:ea typeface="Calibri" pitchFamily="34" charset="-122"/>
+                <a:cs typeface="Calibri" pitchFamily="34" charset="-120"/>
               </a:rPr>
               <a:t>UNDERGRADUATE</a:t>
             </a:r>
@@ -9974,7 +9988,7 @@
             <a:r>
               <a:rPr lang="en-US" sz="2600" b="1" spc="-100" kern="0" dirty="0">
                 <a:solidFill>
-                  <a:srgbClr val="1A1A17"/>
+                  <a:srgbClr val="17171A"/>
                 </a:solidFill>
                 <a:latin typeface="Georgia" pitchFamily="34" charset="0"/>
                 <a:ea typeface="Georgia" pitchFamily="34" charset="-122"/>
@@ -9991,7 +10005,7 @@
             <a:r>
               <a:rPr lang="en-US" sz="2600" b="1" i="1" spc="-100" kern="0" dirty="0">
                 <a:solidFill>
-                  <a:srgbClr val="1A1A17"/>
+                  <a:srgbClr val="17171A"/>
                 </a:solidFill>
                 <a:latin typeface="Georgia" pitchFamily="34" charset="0"/>
                 <a:ea typeface="Georgia" pitchFamily="34" charset="-122"/>
@@ -10008,7 +10022,7 @@
             <a:r>
               <a:rPr lang="en-US" sz="2600" b="1" i="1" spc="-100" kern="0" dirty="0">
                 <a:solidFill>
-                  <a:srgbClr val="1A1A17"/>
+                  <a:srgbClr val="17171A"/>
                 </a:solidFill>
                 <a:latin typeface="Georgia" pitchFamily="34" charset="0"/>
                 <a:ea typeface="Georgia" pitchFamily="34" charset="-122"/>
@@ -10035,7 +10049,7 @@
             <a:avLst/>
           </a:prstGeom>
           <a:solidFill>
-            <a:srgbClr val="1A1A17"/>
+            <a:srgbClr val="17171A"/>
           </a:solidFill>
           <a:ln/>
         </p:spPr>
@@ -10067,11 +10081,11 @@
             <a:r>
               <a:rPr lang="en-US" sz="800" b="1" spc="400" kern="0" dirty="0">
                 <a:solidFill>
-                  <a:srgbClr val="FFF1E5"/>
-                </a:solidFill>
-                <a:latin typeface="Consolas" pitchFamily="34" charset="0"/>
-                <a:ea typeface="Consolas" pitchFamily="34" charset="-122"/>
-                <a:cs typeface="Consolas" pitchFamily="34" charset="-120"/>
+                  <a:srgbClr val="F7F4EF"/>
+                </a:solidFill>
+                <a:latin typeface="Calibri" pitchFamily="34" charset="0"/>
+                <a:ea typeface="Calibri" pitchFamily="34" charset="-122"/>
+                <a:cs typeface="Calibri" pitchFamily="34" charset="-120"/>
               </a:rPr>
               <a:t>3× DEAN'S LIST</a:t>
             </a:r>
@@ -10094,7 +10108,7 @@
             <a:avLst/>
           </a:prstGeom>
           <a:solidFill>
-            <a:srgbClr val="1A1A17"/>
+            <a:srgbClr val="17171A"/>
           </a:solidFill>
           <a:ln/>
         </p:spPr>
@@ -10126,11 +10140,11 @@
             <a:r>
               <a:rPr lang="en-US" sz="800" b="1" spc="400" kern="0" dirty="0">
                 <a:solidFill>
-                  <a:srgbClr val="FFF1E5"/>
-                </a:solidFill>
-                <a:latin typeface="Consolas" pitchFamily="34" charset="0"/>
-                <a:ea typeface="Consolas" pitchFamily="34" charset="-122"/>
-                <a:cs typeface="Consolas" pitchFamily="34" charset="-120"/>
+                  <a:srgbClr val="F7F4EF"/>
+                </a:solidFill>
+                <a:latin typeface="Calibri" pitchFamily="34" charset="0"/>
+                <a:ea typeface="Calibri" pitchFamily="34" charset="-122"/>
+                <a:cs typeface="Calibri" pitchFamily="34" charset="-120"/>
               </a:rPr>
               <a:t>LUMBERJACK FULL RIDE</a:t>
             </a:r>
@@ -10153,7 +10167,7 @@
             <a:avLst/>
           </a:prstGeom>
           <a:solidFill>
-            <a:srgbClr val="1A1A17"/>
+            <a:srgbClr val="17171A"/>
           </a:solidFill>
           <a:ln/>
         </p:spPr>
@@ -10185,11 +10199,11 @@
             <a:r>
               <a:rPr lang="en-US" sz="800" b="1" spc="400" kern="0" dirty="0">
                 <a:solidFill>
-                  <a:srgbClr val="FFF1E5"/>
-                </a:solidFill>
-                <a:latin typeface="Consolas" pitchFamily="34" charset="0"/>
-                <a:ea typeface="Consolas" pitchFamily="34" charset="-122"/>
-                <a:cs typeface="Consolas" pitchFamily="34" charset="-120"/>
+                  <a:srgbClr val="F7F4EF"/>
+                </a:solidFill>
+                <a:latin typeface="Calibri" pitchFamily="34" charset="0"/>
+                <a:ea typeface="Calibri" pitchFamily="34" charset="-122"/>
+                <a:cs typeface="Calibri" pitchFamily="34" charset="-120"/>
               </a:rPr>
               <a:t>NSCS</a:t>
             </a:r>
@@ -10212,7 +10226,7 @@
             <a:avLst/>
           </a:prstGeom>
           <a:solidFill>
-            <a:srgbClr val="1A1A17"/>
+            <a:srgbClr val="17171A"/>
           </a:solidFill>
           <a:ln/>
         </p:spPr>
@@ -10244,11 +10258,11 @@
             <a:r>
               <a:rPr lang="en-US" sz="800" b="1" spc="400" kern="0" dirty="0">
                 <a:solidFill>
-                  <a:srgbClr val="FFF1E5"/>
-                </a:solidFill>
-                <a:latin typeface="Consolas" pitchFamily="34" charset="0"/>
-                <a:ea typeface="Consolas" pitchFamily="34" charset="-122"/>
-                <a:cs typeface="Consolas" pitchFamily="34" charset="-120"/>
+                  <a:srgbClr val="F7F4EF"/>
+                </a:solidFill>
+                <a:latin typeface="Calibri" pitchFamily="34" charset="0"/>
+                <a:ea typeface="Calibri" pitchFamily="34" charset="-122"/>
+                <a:cs typeface="Calibri" pitchFamily="34" charset="-120"/>
               </a:rPr>
               <a:t>1ST-GEN</a:t>
             </a:r>
@@ -10283,11 +10297,11 @@
             <a:r>
               <a:rPr lang="en-US" sz="900" spc="600" kern="0" dirty="0">
                 <a:solidFill>
-                  <a:srgbClr val="1A1A17"/>
-                </a:solidFill>
-                <a:latin typeface="Consolas" pitchFamily="34" charset="0"/>
-                <a:ea typeface="Consolas" pitchFamily="34" charset="-122"/>
-                <a:cs typeface="Consolas" pitchFamily="34" charset="-120"/>
+                  <a:srgbClr val="17171A"/>
+                </a:solidFill>
+                <a:latin typeface="Calibri" pitchFamily="34" charset="0"/>
+                <a:ea typeface="Calibri" pitchFamily="34" charset="-122"/>
+                <a:cs typeface="Calibri" pitchFamily="34" charset="-120"/>
               </a:rPr>
               <a:t>NORTHERN ARIZONA UNIVERSITY  ·  FLAGSTAFF, AZ</a:t>
             </a:r>
@@ -10310,7 +10324,7 @@
             <a:avLst/>
           </a:prstGeom>
           <a:solidFill>
-            <a:srgbClr val="1A1A17"/>
+            <a:srgbClr val="17171A"/>
           </a:solidFill>
           <a:ln/>
         </p:spPr>
@@ -10342,11 +10356,11 @@
             <a:r>
               <a:rPr lang="en-US" sz="800" b="1" spc="1000" kern="0" dirty="0">
                 <a:solidFill>
-                  <a:srgbClr val="C8A04A"/>
-                </a:solidFill>
-                <a:latin typeface="Consolas" pitchFamily="34" charset="0"/>
-                <a:ea typeface="Consolas" pitchFamily="34" charset="-122"/>
-                <a:cs typeface="Consolas" pitchFamily="34" charset="-120"/>
+                  <a:srgbClr val="A8C5E8"/>
+                </a:solidFill>
+                <a:latin typeface="Calibri" pitchFamily="34" charset="0"/>
+                <a:ea typeface="Calibri" pitchFamily="34" charset="-122"/>
+                <a:cs typeface="Calibri" pitchFamily="34" charset="-120"/>
               </a:rPr>
               <a:t>CREDENTIALS</a:t>
             </a:r>
@@ -10381,7 +10395,7 @@
             <a:r>
               <a:rPr lang="en-US" sz="1150" b="1" dirty="0">
                 <a:solidFill>
-                  <a:srgbClr val="FFF1E5"/>
+                  <a:srgbClr val="F7F4EF"/>
                 </a:solidFill>
                 <a:latin typeface="Calibri" pitchFamily="34" charset="0"/>
                 <a:ea typeface="Calibri" pitchFamily="34" charset="-122"/>
@@ -10395,7 +10409,7 @@
             <a:r>
               <a:rPr lang="en-US" sz="1150" dirty="0">
                 <a:solidFill>
-                  <a:srgbClr val="C8A04A"/>
+                  <a:srgbClr val="A8C5E8"/>
                 </a:solidFill>
                 <a:latin typeface="Calibri" pitchFamily="34" charset="0"/>
                 <a:ea typeface="Calibri" pitchFamily="34" charset="-122"/>
@@ -10409,7 +10423,7 @@
             <a:r>
               <a:rPr lang="en-US" sz="1150" dirty="0">
                 <a:solidFill>
-                  <a:srgbClr val="FFF1E5"/>
+                  <a:srgbClr val="F7F4EF"/>
                 </a:solidFill>
                 <a:latin typeface="Calibri" pitchFamily="34" charset="0"/>
                 <a:ea typeface="Calibri" pitchFamily="34" charset="-122"/>
@@ -10423,7 +10437,7 @@
             <a:r>
               <a:rPr lang="en-US" sz="1150" dirty="0">
                 <a:solidFill>
-                  <a:srgbClr val="C8A04A"/>
+                  <a:srgbClr val="A8C5E8"/>
                 </a:solidFill>
                 <a:latin typeface="Calibri" pitchFamily="34" charset="0"/>
                 <a:ea typeface="Calibri" pitchFamily="34" charset="-122"/>
@@ -10437,7 +10451,7 @@
             <a:r>
               <a:rPr lang="en-US" sz="1150" dirty="0">
                 <a:solidFill>
-                  <a:srgbClr val="FFF1E5"/>
+                  <a:srgbClr val="F7F4EF"/>
                 </a:solidFill>
                 <a:latin typeface="Calibri" pitchFamily="34" charset="0"/>
                 <a:ea typeface="Calibri" pitchFamily="34" charset="-122"/>
@@ -10463,7 +10477,7 @@
     <p:bg>
       <p:bgPr>
         <a:solidFill>
-          <a:srgbClr val="FFF1E5"/>
+          <a:srgbClr val="F7F4EF"/>
         </a:solidFill>
       </p:bgPr>
     </p:bg>
@@ -10496,7 +10510,7 @@
             <a:avLst/>
           </a:prstGeom>
           <a:solidFill>
-            <a:srgbClr val="1A1A17"/>
+            <a:srgbClr val="17171A"/>
           </a:solidFill>
           <a:ln/>
         </p:spPr>
@@ -10528,11 +10542,11 @@
             <a:r>
               <a:rPr lang="en-US" sz="900" b="1" spc="400" kern="0" dirty="0">
                 <a:solidFill>
-                  <a:srgbClr val="A0032A"/>
-                </a:solidFill>
-                <a:latin typeface="Consolas" pitchFamily="34" charset="0"/>
-                <a:ea typeface="Consolas" pitchFamily="34" charset="-122"/>
-                <a:cs typeface="Consolas" pitchFamily="34" charset="-120"/>
+                  <a:srgbClr val="1E3A5F"/>
+                </a:solidFill>
+                <a:latin typeface="Calibri" pitchFamily="34" charset="0"/>
+                <a:ea typeface="Calibri" pitchFamily="34" charset="-122"/>
+                <a:cs typeface="Calibri" pitchFamily="34" charset="-120"/>
               </a:rPr>
               <a:t>§ 09   </a:t>
             </a:r>
@@ -10542,11 +10556,11 @@
             <a:r>
               <a:rPr lang="en-US" sz="900" spc="400" kern="0" dirty="0">
                 <a:solidFill>
-                  <a:srgbClr val="1A1A17"/>
-                </a:solidFill>
-                <a:latin typeface="Consolas" pitchFamily="34" charset="0"/>
-                <a:ea typeface="Consolas" pitchFamily="34" charset="-122"/>
-                <a:cs typeface="Consolas" pitchFamily="34" charset="-120"/>
+                  <a:srgbClr val="17171A"/>
+                </a:solidFill>
+                <a:latin typeface="Calibri" pitchFamily="34" charset="0"/>
+                <a:ea typeface="Calibri" pitchFamily="34" charset="-122"/>
+                <a:cs typeface="Calibri" pitchFamily="34" charset="-120"/>
               </a:rPr>
               <a:t>CAREER TIMELINE</a:t>
             </a:r>
@@ -10581,11 +10595,11 @@
             <a:r>
               <a:rPr lang="en-US" sz="900" spc="400" kern="0" dirty="0">
                 <a:solidFill>
-                  <a:srgbClr val="6B665E"/>
-                </a:solidFill>
-                <a:latin typeface="Consolas" pitchFamily="34" charset="0"/>
-                <a:ea typeface="Consolas" pitchFamily="34" charset="-122"/>
-                <a:cs typeface="Consolas" pitchFamily="34" charset="-120"/>
+                  <a:srgbClr val="6E6B66"/>
+                </a:solidFill>
+                <a:latin typeface="Calibri" pitchFamily="34" charset="0"/>
+                <a:ea typeface="Calibri" pitchFamily="34" charset="-122"/>
+                <a:cs typeface="Calibri" pitchFamily="34" charset="-120"/>
               </a:rPr>
               <a:t>THOMAS MCCOY — THE LEDGER, VOL. I</a:t>
             </a:r>
@@ -10608,7 +10622,7 @@
             <a:avLst/>
           </a:prstGeom>
           <a:solidFill>
-            <a:srgbClr val="1A1A17"/>
+            <a:srgbClr val="17171A"/>
           </a:solidFill>
           <a:ln/>
         </p:spPr>
@@ -10640,11 +10654,11 @@
             <a:r>
               <a:rPr lang="en-US" sz="800" dirty="0">
                 <a:solidFill>
-                  <a:srgbClr val="6B665E"/>
-                </a:solidFill>
-                <a:latin typeface="Consolas" pitchFamily="34" charset="0"/>
-                <a:ea typeface="Consolas" pitchFamily="34" charset="-122"/>
-                <a:cs typeface="Consolas" pitchFamily="34" charset="-120"/>
+                  <a:srgbClr val="6E6B66"/>
+                </a:solidFill>
+                <a:latin typeface="Calibri" pitchFamily="34" charset="0"/>
+                <a:ea typeface="Calibri" pitchFamily="34" charset="-122"/>
+                <a:cs typeface="Calibri" pitchFamily="34" charset="-120"/>
               </a:rPr>
               <a:t>tpmccoy2020@gmail.com  ·  480.828.1125  ·  Gilbert, AZ</a:t>
             </a:r>
@@ -10679,11 +10693,11 @@
             <a:r>
               <a:rPr lang="en-US" sz="800" spc="400" kern="0" dirty="0">
                 <a:solidFill>
-                  <a:srgbClr val="6B665E"/>
-                </a:solidFill>
-                <a:latin typeface="Consolas" pitchFamily="34" charset="0"/>
-                <a:ea typeface="Consolas" pitchFamily="34" charset="-122"/>
-                <a:cs typeface="Consolas" pitchFamily="34" charset="-120"/>
+                  <a:srgbClr val="6E6B66"/>
+                </a:solidFill>
+                <a:latin typeface="Calibri" pitchFamily="34" charset="0"/>
+                <a:ea typeface="Calibri" pitchFamily="34" charset="-122"/>
+                <a:cs typeface="Calibri" pitchFamily="34" charset="-120"/>
               </a:rPr>
               <a:t>PORTFOLIO № 02   /   09 OF 10</a:t>
             </a:r>
@@ -10718,7 +10732,7 @@
             <a:r>
               <a:rPr lang="en-US" sz="3800" b="1" spc="-100" kern="0" dirty="0">
                 <a:solidFill>
-                  <a:srgbClr val="1A1A17"/>
+                  <a:srgbClr val="17171A"/>
                 </a:solidFill>
                 <a:latin typeface="Georgia" pitchFamily="34" charset="0"/>
                 <a:ea typeface="Georgia" pitchFamily="34" charset="-122"/>
@@ -10732,7 +10746,7 @@
             <a:r>
               <a:rPr lang="en-US" sz="3800" b="1" i="1" spc="-100" kern="0" dirty="0">
                 <a:solidFill>
-                  <a:srgbClr val="A0032A"/>
+                  <a:srgbClr val="1E3A5F"/>
                 </a:solidFill>
                 <a:latin typeface="Georgia" pitchFamily="34" charset="0"/>
                 <a:ea typeface="Georgia" pitchFamily="34" charset="-122"/>
@@ -10771,11 +10785,11 @@
             <a:r>
               <a:rPr lang="en-US" sz="1000" spc="1000" kern="0" dirty="0">
                 <a:solidFill>
-                  <a:srgbClr val="A0032A"/>
-                </a:solidFill>
-                <a:latin typeface="Consolas" pitchFamily="34" charset="0"/>
-                <a:ea typeface="Consolas" pitchFamily="34" charset="-122"/>
-                <a:cs typeface="Consolas" pitchFamily="34" charset="-120"/>
+                  <a:srgbClr val="1E3A5F"/>
+                </a:solidFill>
+                <a:latin typeface="Calibri" pitchFamily="34" charset="0"/>
+                <a:ea typeface="Calibri" pitchFamily="34" charset="-122"/>
+                <a:cs typeface="Calibri" pitchFamily="34" charset="-120"/>
               </a:rPr>
               <a:t>FROM FINANCIAL REPRESENTATIVE TO SENIOR ACCOUNTANT  ·  CHRONOLOGICALLY</a:t>
             </a:r>
@@ -10798,7 +10812,7 @@
             <a:avLst/>
           </a:prstGeom>
           <a:solidFill>
-            <a:srgbClr val="1A1A17"/>
+            <a:srgbClr val="17171A"/>
           </a:solidFill>
           <a:ln/>
         </p:spPr>
@@ -10818,11 +10832,11 @@
             <a:avLst/>
           </a:prstGeom>
           <a:solidFill>
-            <a:srgbClr val="C8A04A"/>
+            <a:srgbClr val="A8C5E8"/>
           </a:solidFill>
           <a:ln w="12700">
             <a:solidFill>
-              <a:srgbClr val="1A1A17"/>
+              <a:srgbClr val="17171A"/>
             </a:solidFill>
             <a:prstDash val="solid"/>
           </a:ln>
@@ -10855,11 +10869,11 @@
             <a:r>
               <a:rPr lang="en-US" sz="900" b="1" spc="800" kern="0" dirty="0">
                 <a:solidFill>
-                  <a:srgbClr val="A0032A"/>
-                </a:solidFill>
-                <a:latin typeface="Consolas" pitchFamily="34" charset="0"/>
-                <a:ea typeface="Consolas" pitchFamily="34" charset="-122"/>
-                <a:cs typeface="Consolas" pitchFamily="34" charset="-120"/>
+                  <a:srgbClr val="1E3A5F"/>
+                </a:solidFill>
+                <a:latin typeface="Calibri" pitchFamily="34" charset="0"/>
+                <a:ea typeface="Calibri" pitchFamily="34" charset="-122"/>
+                <a:cs typeface="Calibri" pitchFamily="34" charset="-120"/>
               </a:rPr>
               <a:t>CH. I</a:t>
             </a:r>
@@ -10894,11 +10908,11 @@
             <a:r>
               <a:rPr lang="en-US" sz="900" spc="600" kern="0" dirty="0">
                 <a:solidFill>
-                  <a:srgbClr val="6B665E"/>
-                </a:solidFill>
-                <a:latin typeface="Consolas" pitchFamily="34" charset="0"/>
-                <a:ea typeface="Consolas" pitchFamily="34" charset="-122"/>
-                <a:cs typeface="Consolas" pitchFamily="34" charset="-120"/>
+                  <a:srgbClr val="6E6B66"/>
+                </a:solidFill>
+                <a:latin typeface="Calibri" pitchFamily="34" charset="0"/>
+                <a:ea typeface="Calibri" pitchFamily="34" charset="-122"/>
+                <a:cs typeface="Calibri" pitchFamily="34" charset="-120"/>
               </a:rPr>
               <a:t>2020</a:t>
             </a:r>
@@ -10921,11 +10935,11 @@
             <a:avLst/>
           </a:prstGeom>
           <a:solidFill>
-            <a:srgbClr val="F4ECDF"/>
+            <a:srgbClr val="EDE8DE"/>
           </a:solidFill>
           <a:ln w="9525">
             <a:solidFill>
-              <a:srgbClr val="1A1A17"/>
+              <a:srgbClr val="17171A"/>
             </a:solidFill>
             <a:prstDash val="solid"/>
           </a:ln>
@@ -10946,7 +10960,7 @@
             <a:avLst/>
           </a:prstGeom>
           <a:solidFill>
-            <a:srgbClr val="A0032A"/>
+            <a:srgbClr val="1E3A5F"/>
           </a:solidFill>
           <a:ln/>
         </p:spPr>
@@ -10978,7 +10992,7 @@
             <a:r>
               <a:rPr lang="en-US" sz="1700" b="1" spc="-100" kern="0" dirty="0">
                 <a:solidFill>
-                  <a:srgbClr val="1A1A17"/>
+                  <a:srgbClr val="17171A"/>
                 </a:solidFill>
                 <a:latin typeface="Georgia" pitchFamily="34" charset="0"/>
                 <a:ea typeface="Georgia" pitchFamily="34" charset="-122"/>
@@ -11017,7 +11031,7 @@
             <a:r>
               <a:rPr lang="en-US" sz="1100" i="1" dirty="0">
                 <a:solidFill>
-                  <a:srgbClr val="6B665E"/>
+                  <a:srgbClr val="6E6B66"/>
                 </a:solidFill>
                 <a:latin typeface="Calibri" pitchFamily="34" charset="0"/>
                 <a:ea typeface="Calibri" pitchFamily="34" charset="-122"/>
@@ -11044,7 +11058,7 @@
             <a:avLst/>
           </a:prstGeom>
           <a:solidFill>
-            <a:srgbClr val="A0032A"/>
+            <a:srgbClr val="1E3A5F"/>
           </a:solidFill>
           <a:ln/>
         </p:spPr>
@@ -11076,7 +11090,7 @@
             <a:r>
               <a:rPr lang="en-US" sz="1000" dirty="0">
                 <a:solidFill>
-                  <a:srgbClr val="2C2C29"/>
+                  <a:srgbClr val="2A2A2D"/>
                 </a:solidFill>
                 <a:latin typeface="Calibri" pitchFamily="34" charset="0"/>
                 <a:ea typeface="Calibri" pitchFamily="34" charset="-122"/>
@@ -11103,11 +11117,11 @@
             <a:avLst/>
           </a:prstGeom>
           <a:solidFill>
-            <a:srgbClr val="C8A04A"/>
+            <a:srgbClr val="A8C5E8"/>
           </a:solidFill>
           <a:ln w="12700">
             <a:solidFill>
-              <a:srgbClr val="1A1A17"/>
+              <a:srgbClr val="17171A"/>
             </a:solidFill>
             <a:prstDash val="solid"/>
           </a:ln>
@@ -11140,11 +11154,11 @@
             <a:r>
               <a:rPr lang="en-US" sz="900" b="1" spc="800" kern="0" dirty="0">
                 <a:solidFill>
-                  <a:srgbClr val="A0032A"/>
-                </a:solidFill>
-                <a:latin typeface="Consolas" pitchFamily="34" charset="0"/>
-                <a:ea typeface="Consolas" pitchFamily="34" charset="-122"/>
-                <a:cs typeface="Consolas" pitchFamily="34" charset="-120"/>
+                  <a:srgbClr val="1E3A5F"/>
+                </a:solidFill>
+                <a:latin typeface="Calibri" pitchFamily="34" charset="0"/>
+                <a:ea typeface="Calibri" pitchFamily="34" charset="-122"/>
+                <a:cs typeface="Calibri" pitchFamily="34" charset="-120"/>
               </a:rPr>
               <a:t>CH. II</a:t>
             </a:r>
@@ -11179,11 +11193,11 @@
             <a:r>
               <a:rPr lang="en-US" sz="900" spc="600" kern="0" dirty="0">
                 <a:solidFill>
-                  <a:srgbClr val="6B665E"/>
-                </a:solidFill>
-                <a:latin typeface="Consolas" pitchFamily="34" charset="0"/>
-                <a:ea typeface="Consolas" pitchFamily="34" charset="-122"/>
-                <a:cs typeface="Consolas" pitchFamily="34" charset="-120"/>
+                  <a:srgbClr val="6E6B66"/>
+                </a:solidFill>
+                <a:latin typeface="Calibri" pitchFamily="34" charset="0"/>
+                <a:ea typeface="Calibri" pitchFamily="34" charset="-122"/>
+                <a:cs typeface="Calibri" pitchFamily="34" charset="-120"/>
               </a:rPr>
               <a:t>JAN — MAY 2021</a:t>
             </a:r>
@@ -11206,11 +11220,11 @@
             <a:avLst/>
           </a:prstGeom>
           <a:solidFill>
-            <a:srgbClr val="F4ECDF"/>
+            <a:srgbClr val="EDE8DE"/>
           </a:solidFill>
           <a:ln w="9525">
             <a:solidFill>
-              <a:srgbClr val="1A1A17"/>
+              <a:srgbClr val="17171A"/>
             </a:solidFill>
             <a:prstDash val="solid"/>
           </a:ln>
@@ -11231,7 +11245,7 @@
             <a:avLst/>
           </a:prstGeom>
           <a:solidFill>
-            <a:srgbClr val="A0032A"/>
+            <a:srgbClr val="1E3A5F"/>
           </a:solidFill>
           <a:ln/>
         </p:spPr>
@@ -11263,7 +11277,7 @@
             <a:r>
               <a:rPr lang="en-US" sz="1700" b="1" spc="-100" kern="0" dirty="0">
                 <a:solidFill>
-                  <a:srgbClr val="1A1A17"/>
+                  <a:srgbClr val="17171A"/>
                 </a:solidFill>
                 <a:latin typeface="Georgia" pitchFamily="34" charset="0"/>
                 <a:ea typeface="Georgia" pitchFamily="34" charset="-122"/>
@@ -11302,7 +11316,7 @@
             <a:r>
               <a:rPr lang="en-US" sz="1100" i="1" dirty="0">
                 <a:solidFill>
-                  <a:srgbClr val="6B665E"/>
+                  <a:srgbClr val="6E6B66"/>
                 </a:solidFill>
                 <a:latin typeface="Calibri" pitchFamily="34" charset="0"/>
                 <a:ea typeface="Calibri" pitchFamily="34" charset="-122"/>
@@ -11329,7 +11343,7 @@
             <a:avLst/>
           </a:prstGeom>
           <a:solidFill>
-            <a:srgbClr val="A0032A"/>
+            <a:srgbClr val="1E3A5F"/>
           </a:solidFill>
           <a:ln/>
         </p:spPr>
@@ -11361,7 +11375,7 @@
             <a:r>
               <a:rPr lang="en-US" sz="1000" dirty="0">
                 <a:solidFill>
-                  <a:srgbClr val="2C2C29"/>
+                  <a:srgbClr val="2A2A2D"/>
                 </a:solidFill>
                 <a:latin typeface="Calibri" pitchFamily="34" charset="0"/>
                 <a:ea typeface="Calibri" pitchFamily="34" charset="-122"/>
@@ -11388,11 +11402,11 @@
             <a:avLst/>
           </a:prstGeom>
           <a:solidFill>
-            <a:srgbClr val="A0032A"/>
+            <a:srgbClr val="1E3A5F"/>
           </a:solidFill>
           <a:ln w="12700">
             <a:solidFill>
-              <a:srgbClr val="1A1A17"/>
+              <a:srgbClr val="17171A"/>
             </a:solidFill>
             <a:prstDash val="solid"/>
           </a:ln>
@@ -11425,11 +11439,11 @@
             <a:r>
               <a:rPr lang="en-US" sz="900" b="1" spc="800" kern="0" dirty="0">
                 <a:solidFill>
-                  <a:srgbClr val="A0032A"/>
-                </a:solidFill>
-                <a:latin typeface="Consolas" pitchFamily="34" charset="0"/>
-                <a:ea typeface="Consolas" pitchFamily="34" charset="-122"/>
-                <a:cs typeface="Consolas" pitchFamily="34" charset="-120"/>
+                  <a:srgbClr val="1E3A5F"/>
+                </a:solidFill>
+                <a:latin typeface="Calibri" pitchFamily="34" charset="0"/>
+                <a:ea typeface="Calibri" pitchFamily="34" charset="-122"/>
+                <a:cs typeface="Calibri" pitchFamily="34" charset="-120"/>
               </a:rPr>
               <a:t>CH. III</a:t>
             </a:r>
@@ -11464,11 +11478,11 @@
             <a:r>
               <a:rPr lang="en-US" sz="900" spc="600" kern="0" dirty="0">
                 <a:solidFill>
-                  <a:srgbClr val="6B665E"/>
-                </a:solidFill>
-                <a:latin typeface="Consolas" pitchFamily="34" charset="0"/>
-                <a:ea typeface="Consolas" pitchFamily="34" charset="-122"/>
-                <a:cs typeface="Consolas" pitchFamily="34" charset="-120"/>
+                  <a:srgbClr val="6E6B66"/>
+                </a:solidFill>
+                <a:latin typeface="Calibri" pitchFamily="34" charset="0"/>
+                <a:ea typeface="Calibri" pitchFamily="34" charset="-122"/>
+                <a:cs typeface="Calibri" pitchFamily="34" charset="-120"/>
               </a:rPr>
               <a:t>2021 — PRESENT</a:t>
             </a:r>
@@ -11491,11 +11505,11 @@
             <a:avLst/>
           </a:prstGeom>
           <a:solidFill>
-            <a:srgbClr val="1A1A17"/>
+            <a:srgbClr val="1E3A5F"/>
           </a:solidFill>
           <a:ln w="9525">
             <a:solidFill>
-              <a:srgbClr val="1A1A17"/>
+              <a:srgbClr val="17171A"/>
             </a:solidFill>
             <a:prstDash val="solid"/>
           </a:ln>
@@ -11516,7 +11530,7 @@
             <a:avLst/>
           </a:prstGeom>
           <a:solidFill>
-            <a:srgbClr val="A0032A"/>
+            <a:srgbClr val="1E3A5F"/>
           </a:solidFill>
           <a:ln/>
         </p:spPr>
@@ -11548,7 +11562,7 @@
             <a:r>
               <a:rPr lang="en-US" sz="1700" b="1" spc="-100" kern="0" dirty="0">
                 <a:solidFill>
-                  <a:srgbClr val="FFF1E5"/>
+                  <a:srgbClr val="F7F4EF"/>
                 </a:solidFill>
                 <a:latin typeface="Georgia" pitchFamily="34" charset="0"/>
                 <a:ea typeface="Georgia" pitchFamily="34" charset="-122"/>
@@ -11587,7 +11601,7 @@
             <a:r>
               <a:rPr lang="en-US" sz="1100" i="1" dirty="0">
                 <a:solidFill>
-                  <a:srgbClr val="C8A04A"/>
+                  <a:srgbClr val="A8C5E8"/>
                 </a:solidFill>
                 <a:latin typeface="Calibri" pitchFamily="34" charset="0"/>
                 <a:ea typeface="Calibri" pitchFamily="34" charset="-122"/>
@@ -11614,7 +11628,7 @@
             <a:avLst/>
           </a:prstGeom>
           <a:solidFill>
-            <a:srgbClr val="C8A04A"/>
+            <a:srgbClr val="A8C5E8"/>
           </a:solidFill>
           <a:ln/>
         </p:spPr>
@@ -11646,7 +11660,7 @@
             <a:r>
               <a:rPr lang="en-US" sz="1000" dirty="0">
                 <a:solidFill>
-                  <a:srgbClr val="FFF1E5"/>
+                  <a:srgbClr val="F7F4EF"/>
                 </a:solidFill>
                 <a:latin typeface="Calibri" pitchFamily="34" charset="0"/>
                 <a:ea typeface="Calibri" pitchFamily="34" charset="-122"/>
